--- a/Slides/Steam/2026-12-05_ORIENTATIE_PROGRAMMA.pptx
+++ b/Slides/Steam/2026-12-05_ORIENTATIE_PROGRAMMA.pptx
@@ -5,19 +5,17 @@
     <p:sldMasterId id="2147483734" r:id="rId4"/>
   </p:sldMasterIdLst>
   <p:notesMasterIdLst>
-    <p:notesMasterId r:id="rId12"/>
+    <p:notesMasterId r:id="rId10"/>
   </p:notesMasterIdLst>
   <p:handoutMasterIdLst>
-    <p:handoutMasterId r:id="rId13"/>
+    <p:handoutMasterId r:id="rId11"/>
   </p:handoutMasterIdLst>
   <p:sldIdLst>
     <p:sldId id="311" r:id="rId5"/>
     <p:sldId id="262" r:id="rId6"/>
     <p:sldId id="559" r:id="rId7"/>
-    <p:sldId id="557" r:id="rId8"/>
-    <p:sldId id="562" r:id="rId9"/>
-    <p:sldId id="558" r:id="rId10"/>
-    <p:sldId id="563" r:id="rId11"/>
+    <p:sldId id="564" r:id="rId8"/>
+    <p:sldId id="563" r:id="rId9"/>
   </p:sldIdLst>
   <p:sldSz cx="12192000" cy="6858000"/>
   <p:notesSz cx="6794500" cy="9982200"/>
@@ -408,14 +406,14 @@
           <a:effectLst/>
           <a:extLst>
             <a:ext uri="{909E8E84-426E-40dd-AFC4-6F175D3DCCD1}">
-              <a14:hiddenFill xmlns="" xmlns:a14="http://schemas.microsoft.com/office/drawing/2010/main">
+              <a14:hiddenFill xmlns:a14="http://schemas.microsoft.com/office/drawing/2010/main" xmlns="">
                 <a:solidFill>
                   <a:schemeClr val="accent1"/>
                 </a:solidFill>
               </a14:hiddenFill>
             </a:ext>
             <a:ext uri="{91240B29-F687-4f45-9708-019B960494DF}">
-              <a14:hiddenLine xmlns="" xmlns:a14="http://schemas.microsoft.com/office/drawing/2010/main" w="9525">
+              <a14:hiddenLine xmlns:a14="http://schemas.microsoft.com/office/drawing/2010/main" xmlns="" w="9525">
                 <a:solidFill>
                   <a:schemeClr val="tx1"/>
                 </a:solidFill>
@@ -425,7 +423,7 @@
               </a14:hiddenLine>
             </a:ext>
             <a:ext uri="{AF507438-7753-43e0-B8FC-AC1667EBCBE1}">
-              <a14:hiddenEffects xmlns="" xmlns:a14="http://schemas.microsoft.com/office/drawing/2010/main">
+              <a14:hiddenEffects xmlns:a14="http://schemas.microsoft.com/office/drawing/2010/main" xmlns="">
                 <a:effectLst>
                   <a:outerShdw blurRad="63500" dist="38099" dir="2700000" algn="ctr" rotWithShape="0">
                     <a:schemeClr val="bg2">
@@ -436,7 +434,7 @@
               </a14:hiddenEffects>
             </a:ext>
             <a:ext uri="{FAA26D3D-D897-4be2-8F04-BA451C77F1D7}">
-              <ma14:placeholderFlag xmlns="" xmlns:ma14="http://schemas.microsoft.com/office/mac/drawingml/2011/main" val="1"/>
+              <ma14:placeholderFlag xmlns:ma14="http://schemas.microsoft.com/office/mac/drawingml/2011/main" xmlns="" val="1"/>
             </a:ext>
           </a:extLst>
         </p:spPr>
@@ -490,14 +488,14 @@
           <a:effectLst/>
           <a:extLst>
             <a:ext uri="{909E8E84-426E-40dd-AFC4-6F175D3DCCD1}">
-              <a14:hiddenFill xmlns="" xmlns:a14="http://schemas.microsoft.com/office/drawing/2010/main">
+              <a14:hiddenFill xmlns:a14="http://schemas.microsoft.com/office/drawing/2010/main" xmlns="">
                 <a:solidFill>
                   <a:schemeClr val="accent1"/>
                 </a:solidFill>
               </a14:hiddenFill>
             </a:ext>
             <a:ext uri="{91240B29-F687-4f45-9708-019B960494DF}">
-              <a14:hiddenLine xmlns="" xmlns:a14="http://schemas.microsoft.com/office/drawing/2010/main" w="9525">
+              <a14:hiddenLine xmlns:a14="http://schemas.microsoft.com/office/drawing/2010/main" xmlns="" w="9525">
                 <a:solidFill>
                   <a:schemeClr val="tx1"/>
                 </a:solidFill>
@@ -507,7 +505,7 @@
               </a14:hiddenLine>
             </a:ext>
             <a:ext uri="{AF507438-7753-43e0-B8FC-AC1667EBCBE1}">
-              <a14:hiddenEffects xmlns="" xmlns:a14="http://schemas.microsoft.com/office/drawing/2010/main">
+              <a14:hiddenEffects xmlns:a14="http://schemas.microsoft.com/office/drawing/2010/main" xmlns="">
                 <a:effectLst>
                   <a:outerShdw blurRad="63500" dist="38099" dir="2700000" algn="ctr" rotWithShape="0">
                     <a:schemeClr val="bg2">
@@ -518,7 +516,7 @@
               </a14:hiddenEffects>
             </a:ext>
             <a:ext uri="{FAA26D3D-D897-4be2-8F04-BA451C77F1D7}">
-              <ma14:placeholderFlag xmlns="" xmlns:ma14="http://schemas.microsoft.com/office/mac/drawingml/2011/main" val="1"/>
+              <ma14:placeholderFlag xmlns:ma14="http://schemas.microsoft.com/office/mac/drawingml/2011/main" xmlns="" val="1"/>
             </a:ext>
           </a:extLst>
         </p:spPr>
@@ -536,7 +534,7 @@
           <a:p>
             <a:fld id="{0B12D154-6756-477F-ACF6-75A5A1CA1461}" type="datetime1">
               <a:rPr lang="nl-NL" altLang="nl-NL" smtClean="0"/>
-              <a:t>4-5-2026</a:t>
+              <a:t>12-5-2026</a:t>
             </a:fld>
             <a:endParaRPr lang="en-US" altLang="nl-NL"/>
           </a:p>
@@ -567,14 +565,14 @@
           <a:effectLst/>
           <a:extLst>
             <a:ext uri="{909E8E84-426E-40dd-AFC4-6F175D3DCCD1}">
-              <a14:hiddenFill xmlns="" xmlns:a14="http://schemas.microsoft.com/office/drawing/2010/main">
+              <a14:hiddenFill xmlns:a14="http://schemas.microsoft.com/office/drawing/2010/main" xmlns="">
                 <a:solidFill>
                   <a:schemeClr val="accent1"/>
                 </a:solidFill>
               </a14:hiddenFill>
             </a:ext>
             <a:ext uri="{91240B29-F687-4f45-9708-019B960494DF}">
-              <a14:hiddenLine xmlns="" xmlns:a14="http://schemas.microsoft.com/office/drawing/2010/main" w="9525">
+              <a14:hiddenLine xmlns:a14="http://schemas.microsoft.com/office/drawing/2010/main" xmlns="" w="9525">
                 <a:solidFill>
                   <a:schemeClr val="tx1"/>
                 </a:solidFill>
@@ -584,7 +582,7 @@
               </a14:hiddenLine>
             </a:ext>
             <a:ext uri="{AF507438-7753-43e0-B8FC-AC1667EBCBE1}">
-              <a14:hiddenEffects xmlns="" xmlns:a14="http://schemas.microsoft.com/office/drawing/2010/main">
+              <a14:hiddenEffects xmlns:a14="http://schemas.microsoft.com/office/drawing/2010/main" xmlns="">
                 <a:effectLst>
                   <a:outerShdw blurRad="63500" dist="38099" dir="2700000" algn="ctr" rotWithShape="0">
                     <a:schemeClr val="bg2">
@@ -595,7 +593,7 @@
               </a14:hiddenEffects>
             </a:ext>
             <a:ext uri="{FAA26D3D-D897-4be2-8F04-BA451C77F1D7}">
-              <ma14:placeholderFlag xmlns="" xmlns:ma14="http://schemas.microsoft.com/office/mac/drawingml/2011/main" val="1"/>
+              <ma14:placeholderFlag xmlns:ma14="http://schemas.microsoft.com/office/mac/drawingml/2011/main" xmlns="" val="1"/>
             </a:ext>
           </a:extLst>
         </p:spPr>
@@ -649,14 +647,14 @@
           <a:effectLst/>
           <a:extLst>
             <a:ext uri="{909E8E84-426E-40dd-AFC4-6F175D3DCCD1}">
-              <a14:hiddenFill xmlns="" xmlns:a14="http://schemas.microsoft.com/office/drawing/2010/main">
+              <a14:hiddenFill xmlns:a14="http://schemas.microsoft.com/office/drawing/2010/main" xmlns="">
                 <a:solidFill>
                   <a:schemeClr val="accent1"/>
                 </a:solidFill>
               </a14:hiddenFill>
             </a:ext>
             <a:ext uri="{91240B29-F687-4f45-9708-019B960494DF}">
-              <a14:hiddenLine xmlns="" xmlns:a14="http://schemas.microsoft.com/office/drawing/2010/main" w="9525">
+              <a14:hiddenLine xmlns:a14="http://schemas.microsoft.com/office/drawing/2010/main" xmlns="" w="9525">
                 <a:solidFill>
                   <a:schemeClr val="tx1"/>
                 </a:solidFill>
@@ -666,7 +664,7 @@
               </a14:hiddenLine>
             </a:ext>
             <a:ext uri="{AF507438-7753-43e0-B8FC-AC1667EBCBE1}">
-              <a14:hiddenEffects xmlns="" xmlns:a14="http://schemas.microsoft.com/office/drawing/2010/main">
+              <a14:hiddenEffects xmlns:a14="http://schemas.microsoft.com/office/drawing/2010/main" xmlns="">
                 <a:effectLst>
                   <a:outerShdw blurRad="63500" dist="38099" dir="2700000" algn="ctr" rotWithShape="0">
                     <a:schemeClr val="bg2">
@@ -677,7 +675,7 @@
               </a14:hiddenEffects>
             </a:ext>
             <a:ext uri="{FAA26D3D-D897-4be2-8F04-BA451C77F1D7}">
-              <ma14:placeholderFlag xmlns="" xmlns:ma14="http://schemas.microsoft.com/office/mac/drawingml/2011/main" val="1"/>
+              <ma14:placeholderFlag xmlns:ma14="http://schemas.microsoft.com/office/mac/drawingml/2011/main" xmlns="" val="1"/>
             </a:ext>
           </a:extLst>
         </p:spPr>
@@ -696,7 +694,7 @@
             <a:fld id="{80582700-5991-49A4-A0D5-6241D3A3416A}" type="slidenum">
               <a:rPr lang="en-US" altLang="nl-NL"/>
               <a:pPr/>
-              <a:t>‹#›</a:t>
+              <a:t>‹nr.›</a:t>
             </a:fld>
             <a:endParaRPr lang="en-US" altLang="nl-NL"/>
           </a:p>
@@ -764,14 +762,14 @@
           <a:effectLst/>
           <a:extLst>
             <a:ext uri="{909E8E84-426E-40dd-AFC4-6F175D3DCCD1}">
-              <a14:hiddenFill xmlns="" xmlns:a14="http://schemas.microsoft.com/office/drawing/2010/main">
+              <a14:hiddenFill xmlns:a14="http://schemas.microsoft.com/office/drawing/2010/main" xmlns="">
                 <a:solidFill>
                   <a:schemeClr val="accent1"/>
                 </a:solidFill>
               </a14:hiddenFill>
             </a:ext>
             <a:ext uri="{91240B29-F687-4f45-9708-019B960494DF}">
-              <a14:hiddenLine xmlns="" xmlns:a14="http://schemas.microsoft.com/office/drawing/2010/main" w="9525">
+              <a14:hiddenLine xmlns:a14="http://schemas.microsoft.com/office/drawing/2010/main" xmlns="" w="9525">
                 <a:solidFill>
                   <a:schemeClr val="tx1"/>
                 </a:solidFill>
@@ -781,7 +779,7 @@
               </a14:hiddenLine>
             </a:ext>
             <a:ext uri="{AF507438-7753-43e0-B8FC-AC1667EBCBE1}">
-              <a14:hiddenEffects xmlns="" xmlns:a14="http://schemas.microsoft.com/office/drawing/2010/main">
+              <a14:hiddenEffects xmlns:a14="http://schemas.microsoft.com/office/drawing/2010/main" xmlns="">
                 <a:effectLst>
                   <a:outerShdw blurRad="63500" dist="38099" dir="2700000" algn="ctr" rotWithShape="0">
                     <a:schemeClr val="bg2">
@@ -792,7 +790,7 @@
               </a14:hiddenEffects>
             </a:ext>
             <a:ext uri="{FAA26D3D-D897-4be2-8F04-BA451C77F1D7}">
-              <ma14:placeholderFlag xmlns="" xmlns:ma14="http://schemas.microsoft.com/office/mac/drawingml/2011/main" val="1"/>
+              <ma14:placeholderFlag xmlns:ma14="http://schemas.microsoft.com/office/mac/drawingml/2011/main" xmlns="" val="1"/>
             </a:ext>
           </a:extLst>
         </p:spPr>
@@ -846,14 +844,14 @@
           <a:effectLst/>
           <a:extLst>
             <a:ext uri="{909E8E84-426E-40dd-AFC4-6F175D3DCCD1}">
-              <a14:hiddenFill xmlns="" xmlns:a14="http://schemas.microsoft.com/office/drawing/2010/main">
+              <a14:hiddenFill xmlns:a14="http://schemas.microsoft.com/office/drawing/2010/main" xmlns="">
                 <a:solidFill>
                   <a:schemeClr val="accent1"/>
                 </a:solidFill>
               </a14:hiddenFill>
             </a:ext>
             <a:ext uri="{91240B29-F687-4f45-9708-019B960494DF}">
-              <a14:hiddenLine xmlns="" xmlns:a14="http://schemas.microsoft.com/office/drawing/2010/main" w="9525">
+              <a14:hiddenLine xmlns:a14="http://schemas.microsoft.com/office/drawing/2010/main" xmlns="" w="9525">
                 <a:solidFill>
                   <a:schemeClr val="tx1"/>
                 </a:solidFill>
@@ -863,7 +861,7 @@
               </a14:hiddenLine>
             </a:ext>
             <a:ext uri="{AF507438-7753-43e0-B8FC-AC1667EBCBE1}">
-              <a14:hiddenEffects xmlns="" xmlns:a14="http://schemas.microsoft.com/office/drawing/2010/main">
+              <a14:hiddenEffects xmlns:a14="http://schemas.microsoft.com/office/drawing/2010/main" xmlns="">
                 <a:effectLst>
                   <a:outerShdw blurRad="63500" dist="38099" dir="2700000" algn="ctr" rotWithShape="0">
                     <a:schemeClr val="bg2">
@@ -874,7 +872,7 @@
               </a14:hiddenEffects>
             </a:ext>
             <a:ext uri="{FAA26D3D-D897-4be2-8F04-BA451C77F1D7}">
-              <ma14:placeholderFlag xmlns="" xmlns:ma14="http://schemas.microsoft.com/office/mac/drawingml/2011/main" val="1"/>
+              <ma14:placeholderFlag xmlns:ma14="http://schemas.microsoft.com/office/mac/drawingml/2011/main" xmlns="" val="1"/>
             </a:ext>
           </a:extLst>
         </p:spPr>
@@ -892,7 +890,7 @@
           <a:p>
             <a:fld id="{2802B35E-981B-4772-B04D-75CC2431A8B0}" type="datetime1">
               <a:rPr lang="nl-NL" altLang="nl-NL" smtClean="0"/>
-              <a:t>4-5-2026</a:t>
+              <a:t>12-5-2026</a:t>
             </a:fld>
             <a:endParaRPr lang="en-US" altLang="nl-NL"/>
           </a:p>
@@ -928,7 +926,7 @@
           <a:effectLst/>
           <a:extLst>
             <a:ext uri="{AF507438-7753-43e0-B8FC-AC1667EBCBE1}">
-              <a14:hiddenEffects xmlns="" xmlns:a14="http://schemas.microsoft.com/office/drawing/2010/main">
+              <a14:hiddenEffects xmlns:a14="http://schemas.microsoft.com/office/drawing/2010/main" xmlns="">
                 <a:effectLst>
                   <a:outerShdw blurRad="63500" dist="38099" dir="2700000" algn="ctr" rotWithShape="0">
                     <a:srgbClr val="000000">
@@ -939,7 +937,7 @@
               </a14:hiddenEffects>
             </a:ext>
             <a:ext uri="{53640926-AAD7-44d8-BBD7-CCE9431645EC}">
-              <a14:shadowObscured xmlns="" xmlns:a14="http://schemas.microsoft.com/office/drawing/2010/main" val="1"/>
+              <a14:shadowObscured xmlns:a14="http://schemas.microsoft.com/office/drawing/2010/main" xmlns="" val="1"/>
             </a:ext>
           </a:extLst>
         </p:spPr>
@@ -969,14 +967,14 @@
           <a:effectLst/>
           <a:extLst>
             <a:ext uri="{909E8E84-426E-40dd-AFC4-6F175D3DCCD1}">
-              <a14:hiddenFill xmlns="" xmlns:a14="http://schemas.microsoft.com/office/drawing/2010/main">
+              <a14:hiddenFill xmlns:a14="http://schemas.microsoft.com/office/drawing/2010/main" xmlns="">
                 <a:solidFill>
                   <a:schemeClr val="accent1"/>
                 </a:solidFill>
               </a14:hiddenFill>
             </a:ext>
             <a:ext uri="{91240B29-F687-4f45-9708-019B960494DF}">
-              <a14:hiddenLine xmlns="" xmlns:a14="http://schemas.microsoft.com/office/drawing/2010/main" w="9525">
+              <a14:hiddenLine xmlns:a14="http://schemas.microsoft.com/office/drawing/2010/main" xmlns="" w="9525">
                 <a:solidFill>
                   <a:schemeClr val="tx1"/>
                 </a:solidFill>
@@ -986,7 +984,7 @@
               </a14:hiddenLine>
             </a:ext>
             <a:ext uri="{AF507438-7753-43e0-B8FC-AC1667EBCBE1}">
-              <a14:hiddenEffects xmlns="" xmlns:a14="http://schemas.microsoft.com/office/drawing/2010/main">
+              <a14:hiddenEffects xmlns:a14="http://schemas.microsoft.com/office/drawing/2010/main" xmlns="">
                 <a:effectLst>
                   <a:outerShdw blurRad="63500" dist="38099" dir="2700000" algn="ctr" rotWithShape="0">
                     <a:schemeClr val="bg2">
@@ -997,7 +995,7 @@
               </a14:hiddenEffects>
             </a:ext>
             <a:ext uri="{FAA26D3D-D897-4be2-8F04-BA451C77F1D7}">
-              <ma14:placeholderFlag xmlns="" xmlns:ma14="http://schemas.microsoft.com/office/mac/drawingml/2011/main" val="1"/>
+              <ma14:placeholderFlag xmlns:ma14="http://schemas.microsoft.com/office/mac/drawingml/2011/main" xmlns="" val="1"/>
             </a:ext>
           </a:extLst>
         </p:spPr>
@@ -1070,14 +1068,14 @@
           <a:effectLst/>
           <a:extLst>
             <a:ext uri="{909E8E84-426E-40dd-AFC4-6F175D3DCCD1}">
-              <a14:hiddenFill xmlns="" xmlns:a14="http://schemas.microsoft.com/office/drawing/2010/main">
+              <a14:hiddenFill xmlns:a14="http://schemas.microsoft.com/office/drawing/2010/main" xmlns="">
                 <a:solidFill>
                   <a:schemeClr val="accent1"/>
                 </a:solidFill>
               </a14:hiddenFill>
             </a:ext>
             <a:ext uri="{91240B29-F687-4f45-9708-019B960494DF}">
-              <a14:hiddenLine xmlns="" xmlns:a14="http://schemas.microsoft.com/office/drawing/2010/main" w="9525">
+              <a14:hiddenLine xmlns:a14="http://schemas.microsoft.com/office/drawing/2010/main" xmlns="" w="9525">
                 <a:solidFill>
                   <a:schemeClr val="tx1"/>
                 </a:solidFill>
@@ -1087,7 +1085,7 @@
               </a14:hiddenLine>
             </a:ext>
             <a:ext uri="{AF507438-7753-43e0-B8FC-AC1667EBCBE1}">
-              <a14:hiddenEffects xmlns="" xmlns:a14="http://schemas.microsoft.com/office/drawing/2010/main">
+              <a14:hiddenEffects xmlns:a14="http://schemas.microsoft.com/office/drawing/2010/main" xmlns="">
                 <a:effectLst>
                   <a:outerShdw blurRad="63500" dist="38099" dir="2700000" algn="ctr" rotWithShape="0">
                     <a:schemeClr val="bg2">
@@ -1098,7 +1096,7 @@
               </a14:hiddenEffects>
             </a:ext>
             <a:ext uri="{FAA26D3D-D897-4be2-8F04-BA451C77F1D7}">
-              <ma14:placeholderFlag xmlns="" xmlns:ma14="http://schemas.microsoft.com/office/mac/drawingml/2011/main" val="1"/>
+              <ma14:placeholderFlag xmlns:ma14="http://schemas.microsoft.com/office/mac/drawingml/2011/main" xmlns="" val="1"/>
             </a:ext>
           </a:extLst>
         </p:spPr>
@@ -1152,14 +1150,14 @@
           <a:effectLst/>
           <a:extLst>
             <a:ext uri="{909E8E84-426E-40dd-AFC4-6F175D3DCCD1}">
-              <a14:hiddenFill xmlns="" xmlns:a14="http://schemas.microsoft.com/office/drawing/2010/main">
+              <a14:hiddenFill xmlns:a14="http://schemas.microsoft.com/office/drawing/2010/main" xmlns="">
                 <a:solidFill>
                   <a:schemeClr val="accent1"/>
                 </a:solidFill>
               </a14:hiddenFill>
             </a:ext>
             <a:ext uri="{91240B29-F687-4f45-9708-019B960494DF}">
-              <a14:hiddenLine xmlns="" xmlns:a14="http://schemas.microsoft.com/office/drawing/2010/main" w="9525">
+              <a14:hiddenLine xmlns:a14="http://schemas.microsoft.com/office/drawing/2010/main" xmlns="" w="9525">
                 <a:solidFill>
                   <a:schemeClr val="tx1"/>
                 </a:solidFill>
@@ -1169,7 +1167,7 @@
               </a14:hiddenLine>
             </a:ext>
             <a:ext uri="{AF507438-7753-43e0-B8FC-AC1667EBCBE1}">
-              <a14:hiddenEffects xmlns="" xmlns:a14="http://schemas.microsoft.com/office/drawing/2010/main">
+              <a14:hiddenEffects xmlns:a14="http://schemas.microsoft.com/office/drawing/2010/main" xmlns="">
                 <a:effectLst>
                   <a:outerShdw blurRad="63500" dist="38099" dir="2700000" algn="ctr" rotWithShape="0">
                     <a:schemeClr val="bg2">
@@ -1180,7 +1178,7 @@
               </a14:hiddenEffects>
             </a:ext>
             <a:ext uri="{FAA26D3D-D897-4be2-8F04-BA451C77F1D7}">
-              <ma14:placeholderFlag xmlns="" xmlns:ma14="http://schemas.microsoft.com/office/mac/drawingml/2011/main" val="1"/>
+              <ma14:placeholderFlag xmlns:ma14="http://schemas.microsoft.com/office/mac/drawingml/2011/main" xmlns="" val="1"/>
             </a:ext>
           </a:extLst>
         </p:spPr>
@@ -1199,7 +1197,7 @@
             <a:fld id="{BB22E908-7DBC-4D32-B654-1FA166BAB2FA}" type="slidenum">
               <a:rPr lang="en-US" altLang="nl-NL"/>
               <a:pPr/>
-              <a:t>‹#›</a:t>
+              <a:t>‹nr.›</a:t>
             </a:fld>
             <a:endParaRPr lang="en-US" altLang="nl-NL"/>
           </a:p>
@@ -2004,7 +2002,7 @@
         <p:cNvPr id="1" name="">
           <a:extLst>
             <a:ext uri="{FF2B5EF4-FFF2-40B4-BE49-F238E27FC236}">
-              <a16:creationId xmlns:a16="http://schemas.microsoft.com/office/drawing/2014/main" id="{9FE99BBE-318F-9E1B-A4A6-72B3DC2BB288}"/>
+              <a16:creationId xmlns:a16="http://schemas.microsoft.com/office/drawing/2014/main" id="{6AFDE014-0BDF-5891-E6C6-221E04BAB752}"/>
             </a:ext>
           </a:extLst>
         </p:cNvPr>
@@ -2024,7 +2022,7 @@
           <p:cNvPr id="2" name="Tijdelijke aanduiding voor dia-afbeelding 1">
             <a:extLst>
               <a:ext uri="{FF2B5EF4-FFF2-40B4-BE49-F238E27FC236}">
-                <a16:creationId xmlns:a16="http://schemas.microsoft.com/office/drawing/2014/main" id="{B111552B-8F8C-E158-066C-D5A3FAD07CFC}"/>
+                <a16:creationId xmlns:a16="http://schemas.microsoft.com/office/drawing/2014/main" id="{65430BDC-B248-3DF7-C8BC-F49A437662D4}"/>
               </a:ext>
             </a:extLst>
           </p:cNvPr>
@@ -2042,7 +2040,7 @@
           <p:cNvPr id="3" name="Tijdelijke aanduiding voor notities 2">
             <a:extLst>
               <a:ext uri="{FF2B5EF4-FFF2-40B4-BE49-F238E27FC236}">
-                <a16:creationId xmlns:a16="http://schemas.microsoft.com/office/drawing/2014/main" id="{39AFB2A6-8D51-002C-E4F1-EF9A8083AE6E}"/>
+                <a16:creationId xmlns:a16="http://schemas.microsoft.com/office/drawing/2014/main" id="{8E02D203-6742-3619-CC67-D5E4ED3020D0}"/>
               </a:ext>
             </a:extLst>
           </p:cNvPr>
@@ -2176,9 +2174,6 @@
             </a:r>
             <a:endParaRPr lang="nl-NL" dirty="0"/>
           </a:p>
-          <a:p>
-            <a:endParaRPr lang="nl-NL" dirty="0"/>
-          </a:p>
         </p:txBody>
       </p:sp>
       <p:sp>
@@ -2186,7 +2181,7 @@
           <p:cNvPr id="4" name="Tijdelijke aanduiding voor dianummer 3">
             <a:extLst>
               <a:ext uri="{FF2B5EF4-FFF2-40B4-BE49-F238E27FC236}">
-                <a16:creationId xmlns:a16="http://schemas.microsoft.com/office/drawing/2014/main" id="{9AD69308-2E2F-7C7B-F7CA-97A376CFE4D4}"/>
+                <a16:creationId xmlns:a16="http://schemas.microsoft.com/office/drawing/2014/main" id="{EA5B548B-D6E1-D18B-DA63-739ECD698B37}"/>
               </a:ext>
             </a:extLst>
           </p:cNvPr>
@@ -2213,7 +2208,7 @@
     </p:spTree>
     <p:extLst>
       <p:ext uri="{BB962C8B-B14F-4D97-AF65-F5344CB8AC3E}">
-        <p14:creationId xmlns:p14="http://schemas.microsoft.com/office/powerpoint/2010/main" val="4031699636"/>
+        <p14:creationId xmlns:p14="http://schemas.microsoft.com/office/powerpoint/2010/main" val="2775890119"/>
       </p:ext>
     </p:extLst>
   </p:cSld>
@@ -2224,541 +2219,6 @@
 </file>
 
 <file path=ppt/notesSlides/notesSlide5.xml><?xml version="1.0" encoding="utf-8"?>
-<p:notes xmlns:a="http://schemas.openxmlformats.org/drawingml/2006/main" xmlns:r="http://schemas.openxmlformats.org/officeDocument/2006/relationships" xmlns:p="http://schemas.openxmlformats.org/presentationml/2006/main">
-  <p:cSld>
-    <p:spTree>
-      <p:nvGrpSpPr>
-        <p:cNvPr id="1" name="">
-          <a:extLst>
-            <a:ext uri="{FF2B5EF4-FFF2-40B4-BE49-F238E27FC236}">
-              <a16:creationId xmlns:a16="http://schemas.microsoft.com/office/drawing/2014/main" id="{71897BF5-D209-34A5-1C44-88B056CB38BA}"/>
-            </a:ext>
-          </a:extLst>
-        </p:cNvPr>
-        <p:cNvGrpSpPr/>
-        <p:nvPr/>
-      </p:nvGrpSpPr>
-      <p:grpSpPr>
-        <a:xfrm>
-          <a:off x="0" y="0"/>
-          <a:ext cx="0" cy="0"/>
-          <a:chOff x="0" y="0"/>
-          <a:chExt cx="0" cy="0"/>
-        </a:xfrm>
-      </p:grpSpPr>
-      <p:sp>
-        <p:nvSpPr>
-          <p:cNvPr id="2" name="Tijdelijke aanduiding voor dia-afbeelding 1">
-            <a:extLst>
-              <a:ext uri="{FF2B5EF4-FFF2-40B4-BE49-F238E27FC236}">
-                <a16:creationId xmlns:a16="http://schemas.microsoft.com/office/drawing/2014/main" id="{C86384B0-08B1-AFE2-45B0-C7D1E07C0D0F}"/>
-              </a:ext>
-            </a:extLst>
-          </p:cNvPr>
-          <p:cNvSpPr>
-            <a:spLocks noGrp="1" noRot="1" noChangeAspect="1"/>
-          </p:cNvSpPr>
-          <p:nvPr>
-            <p:ph type="sldImg"/>
-          </p:nvPr>
-        </p:nvSpPr>
-        <p:spPr/>
-      </p:sp>
-      <p:sp>
-        <p:nvSpPr>
-          <p:cNvPr id="3" name="Tijdelijke aanduiding voor notities 2">
-            <a:extLst>
-              <a:ext uri="{FF2B5EF4-FFF2-40B4-BE49-F238E27FC236}">
-                <a16:creationId xmlns:a16="http://schemas.microsoft.com/office/drawing/2014/main" id="{C8DAE27F-BF0D-9399-BDAE-734A48D39021}"/>
-              </a:ext>
-            </a:extLst>
-          </p:cNvPr>
-          <p:cNvSpPr>
-            <a:spLocks noGrp="1"/>
-          </p:cNvSpPr>
-          <p:nvPr>
-            <p:ph type="body" idx="1"/>
-          </p:nvPr>
-        </p:nvSpPr>
-        <p:spPr/>
-        <p:txBody>
-          <a:bodyPr/>
-          <a:lstStyle/>
-          <a:p>
-            <a:r>
-              <a:rPr lang="nl-NL" sz="1200" b="1" kern="1200" dirty="0">
-                <a:solidFill>
-                  <a:schemeClr val="tx1"/>
-                </a:solidFill>
-                <a:effectLst/>
-                <a:latin typeface="Arial" charset="0"/>
-                <a:ea typeface="MS PGothic" panose="020B0600070205080204" pitchFamily="34" charset="-128"/>
-                <a:cs typeface="+mn-cs"/>
-              </a:rPr>
-              <a:t>Benodigdheden:</a:t>
-            </a:r>
-          </a:p>
-          <a:p>
-            <a:pPr marL="171450" indent="-171450">
-              <a:buFontTx/>
-              <a:buChar char="-"/>
-            </a:pPr>
-            <a:r>
-              <a:rPr lang="nl-NL" sz="1200" b="1" kern="1200" dirty="0">
-                <a:solidFill>
-                  <a:schemeClr val="tx1"/>
-                </a:solidFill>
-                <a:effectLst/>
-                <a:latin typeface="Arial" charset="0"/>
-                <a:ea typeface="MS PGothic" panose="020B0600070205080204" pitchFamily="34" charset="-128"/>
-                <a:cs typeface="+mn-cs"/>
-              </a:rPr>
-              <a:t>Geeltjes</a:t>
-            </a:r>
-          </a:p>
-          <a:p>
-            <a:pPr marL="171450" indent="-171450">
-              <a:buFontTx/>
-              <a:buChar char="-"/>
-            </a:pPr>
-            <a:r>
-              <a:rPr lang="nl-NL" sz="1200" b="1" kern="1200" dirty="0">
-                <a:solidFill>
-                  <a:schemeClr val="tx1"/>
-                </a:solidFill>
-                <a:effectLst/>
-                <a:latin typeface="Arial" charset="0"/>
-                <a:ea typeface="MS PGothic" panose="020B0600070205080204" pitchFamily="34" charset="-128"/>
-                <a:cs typeface="+mn-cs"/>
-              </a:rPr>
-              <a:t>Pennen</a:t>
-            </a:r>
-          </a:p>
-          <a:p>
-            <a:endParaRPr lang="nl-NL" sz="1200" b="1" kern="1200" dirty="0">
-              <a:solidFill>
-                <a:schemeClr val="tx1"/>
-              </a:solidFill>
-              <a:effectLst/>
-              <a:latin typeface="Arial" charset="0"/>
-              <a:ea typeface="MS PGothic" panose="020B0600070205080204" pitchFamily="34" charset="-128"/>
-              <a:cs typeface="+mn-cs"/>
-            </a:endParaRPr>
-          </a:p>
-          <a:p>
-            <a:r>
-              <a:rPr lang="nl-NL" sz="1200" b="1" kern="1200" dirty="0">
-                <a:solidFill>
-                  <a:schemeClr val="tx1"/>
-                </a:solidFill>
-                <a:effectLst/>
-                <a:latin typeface="Arial" charset="0"/>
-                <a:ea typeface="MS PGothic" panose="020B0600070205080204" pitchFamily="34" charset="-128"/>
-                <a:cs typeface="+mn-cs"/>
-              </a:rPr>
-              <a:t>Vragen bedenken</a:t>
-            </a:r>
-            <a:endParaRPr lang="nl-NL" sz="1200" b="0" kern="1200" dirty="0">
-              <a:solidFill>
-                <a:schemeClr val="tx1"/>
-              </a:solidFill>
-              <a:effectLst/>
-              <a:latin typeface="Arial" charset="0"/>
-              <a:ea typeface="MS PGothic" panose="020B0600070205080204" pitchFamily="34" charset="-128"/>
-              <a:cs typeface="+mn-cs"/>
-            </a:endParaRPr>
-          </a:p>
-          <a:p>
-            <a:r>
-              <a:rPr lang="nl-NL" sz="1200" kern="1200" dirty="0">
-                <a:solidFill>
-                  <a:schemeClr val="tx1"/>
-                </a:solidFill>
-                <a:effectLst/>
-                <a:latin typeface="Arial" charset="0"/>
-                <a:ea typeface="MS PGothic" panose="020B0600070205080204" pitchFamily="34" charset="-128"/>
-                <a:cs typeface="+mn-cs"/>
-              </a:rPr>
-              <a:t>Studenten gaan met de experts van de groepjes per richting bij elkaar zitten en bedenken minimaal 3 vragen voor de desbetreffende afstudeerrichting. Als er een vraag is voor een andere afstudeerrichting dan waar je in zit mag deze aan die richting gegeven worden.</a:t>
-            </a:r>
-          </a:p>
-          <a:p>
-            <a:r>
-              <a:rPr lang="nl-NL" sz="1200" kern="1200" dirty="0">
-                <a:solidFill>
-                  <a:schemeClr val="tx1"/>
-                </a:solidFill>
-                <a:effectLst/>
-                <a:latin typeface="Arial" charset="0"/>
-                <a:ea typeface="MS PGothic" panose="020B0600070205080204" pitchFamily="34" charset="-128"/>
-                <a:cs typeface="+mn-cs"/>
-              </a:rPr>
-              <a:t>Probeer per groep de vragen te categoriseren</a:t>
-            </a:r>
-          </a:p>
-          <a:p>
-            <a:r>
-              <a:rPr lang="nl-NL" sz="1200" kern="1200" dirty="0">
-                <a:solidFill>
-                  <a:schemeClr val="tx1"/>
-                </a:solidFill>
-                <a:effectLst/>
-                <a:latin typeface="Arial" charset="0"/>
-                <a:ea typeface="MS PGothic" panose="020B0600070205080204" pitchFamily="34" charset="-128"/>
-                <a:cs typeface="+mn-cs"/>
-              </a:rPr>
-              <a:t>Elk groepje is verantwoordelijk voor de vragen van een richting.</a:t>
-            </a:r>
-          </a:p>
-          <a:p>
-            <a:r>
-              <a:rPr lang="nl-NL" sz="1200" kern="1200" dirty="0">
-                <a:solidFill>
-                  <a:schemeClr val="tx1"/>
-                </a:solidFill>
-                <a:effectLst/>
-                <a:latin typeface="Arial" charset="0"/>
-                <a:ea typeface="MS PGothic" panose="020B0600070205080204" pitchFamily="34" charset="-128"/>
-                <a:cs typeface="+mn-cs"/>
-              </a:rPr>
-              <a:t>Studenten mogen natuurlijk ook spontaan vragen stellen.</a:t>
-            </a:r>
-          </a:p>
-          <a:p>
-            <a:endParaRPr lang="nl-NL" sz="1200" kern="1200" dirty="0">
-              <a:solidFill>
-                <a:schemeClr val="tx1"/>
-              </a:solidFill>
-              <a:effectLst/>
-              <a:latin typeface="Arial" charset="0"/>
-              <a:ea typeface="MS PGothic" panose="020B0600070205080204" pitchFamily="34" charset="-128"/>
-              <a:cs typeface="+mn-cs"/>
-            </a:endParaRPr>
-          </a:p>
-          <a:p>
-            <a:r>
-              <a:rPr lang="nl-NL" sz="1200" b="1" kern="1200" dirty="0">
-                <a:solidFill>
-                  <a:schemeClr val="tx1"/>
-                </a:solidFill>
-                <a:effectLst/>
-                <a:latin typeface="Arial" charset="0"/>
-                <a:ea typeface="MS PGothic" panose="020B0600070205080204" pitchFamily="34" charset="-128"/>
-                <a:cs typeface="+mn-cs"/>
-              </a:rPr>
-              <a:t>Plan B vragen bedenken:</a:t>
-            </a:r>
-          </a:p>
-          <a:p>
-            <a:r>
-              <a:rPr lang="nl-NL" sz="1200" kern="1200" dirty="0">
-                <a:solidFill>
-                  <a:schemeClr val="tx1"/>
-                </a:solidFill>
-                <a:effectLst/>
-                <a:latin typeface="Arial" charset="0"/>
-                <a:ea typeface="MS PGothic" panose="020B0600070205080204" pitchFamily="34" charset="-128"/>
-                <a:cs typeface="+mn-cs"/>
-              </a:rPr>
-              <a:t>Stel dat dit niet werkt, of er is weinig opkomst:</a:t>
-            </a:r>
-            <a:br>
-              <a:rPr lang="nl-NL" sz="1200" kern="1200" dirty="0">
-                <a:solidFill>
-                  <a:schemeClr val="tx1"/>
-                </a:solidFill>
-                <a:effectLst/>
-                <a:latin typeface="Arial" charset="0"/>
-                <a:ea typeface="MS PGothic" panose="020B0600070205080204" pitchFamily="34" charset="-128"/>
-                <a:cs typeface="+mn-cs"/>
-              </a:rPr>
-            </a:br>
-            <a:r>
-              <a:rPr lang="nl-NL" sz="1200" kern="1200" dirty="0">
-                <a:solidFill>
-                  <a:schemeClr val="tx1"/>
-                </a:solidFill>
-                <a:effectLst/>
-                <a:latin typeface="Arial" charset="0"/>
-                <a:ea typeface="MS PGothic" panose="020B0600070205080204" pitchFamily="34" charset="-128"/>
-                <a:cs typeface="+mn-cs"/>
-              </a:rPr>
-              <a:t>Zorg dat er 5 tafels zijn voor elke afstudeerrichting. Alle studenten lopen door elkaar en schrijven vragen op geeltjes en plakken deze bij de juiste tafel. Vervolgens proberen we duplicaten eruit te halen, zodat er minimaal 3 inhoudelijke vragen overblijven.</a:t>
-            </a:r>
-            <a:endParaRPr lang="nl-NL" dirty="0"/>
-          </a:p>
-        </p:txBody>
-      </p:sp>
-      <p:sp>
-        <p:nvSpPr>
-          <p:cNvPr id="4" name="Tijdelijke aanduiding voor dianummer 3">
-            <a:extLst>
-              <a:ext uri="{FF2B5EF4-FFF2-40B4-BE49-F238E27FC236}">
-                <a16:creationId xmlns:a16="http://schemas.microsoft.com/office/drawing/2014/main" id="{B02AAFA9-2E79-BCED-D158-0120C458DF51}"/>
-              </a:ext>
-            </a:extLst>
-          </p:cNvPr>
-          <p:cNvSpPr>
-            <a:spLocks noGrp="1"/>
-          </p:cNvSpPr>
-          <p:nvPr>
-            <p:ph type="sldNum" sz="quarter" idx="5"/>
-          </p:nvPr>
-        </p:nvSpPr>
-        <p:spPr/>
-        <p:txBody>
-          <a:bodyPr/>
-          <a:lstStyle/>
-          <a:p>
-            <a:fld id="{25AFEC66-6BFA-9A4F-8C14-93D2FB19A680}" type="slidenum">
-              <a:rPr lang="nl-NL" smtClean="0"/>
-              <a:t>5</a:t>
-            </a:fld>
-            <a:endParaRPr lang="nl-NL"/>
-          </a:p>
-        </p:txBody>
-      </p:sp>
-    </p:spTree>
-    <p:extLst>
-      <p:ext uri="{BB962C8B-B14F-4D97-AF65-F5344CB8AC3E}">
-        <p14:creationId xmlns:p14="http://schemas.microsoft.com/office/powerpoint/2010/main" val="2641633740"/>
-      </p:ext>
-    </p:extLst>
-  </p:cSld>
-  <p:clrMapOvr>
-    <a:masterClrMapping/>
-  </p:clrMapOvr>
-</p:notes>
-</file>
-
-<file path=ppt/notesSlides/notesSlide6.xml><?xml version="1.0" encoding="utf-8"?>
-<p:notes xmlns:a="http://schemas.openxmlformats.org/drawingml/2006/main" xmlns:r="http://schemas.openxmlformats.org/officeDocument/2006/relationships" xmlns:p="http://schemas.openxmlformats.org/presentationml/2006/main">
-  <p:cSld>
-    <p:spTree>
-      <p:nvGrpSpPr>
-        <p:cNvPr id="1" name="">
-          <a:extLst>
-            <a:ext uri="{FF2B5EF4-FFF2-40B4-BE49-F238E27FC236}">
-              <a16:creationId xmlns:a16="http://schemas.microsoft.com/office/drawing/2014/main" id="{C10E9D74-7A39-5E78-D07D-9BB8EF92AC82}"/>
-            </a:ext>
-          </a:extLst>
-        </p:cNvPr>
-        <p:cNvGrpSpPr/>
-        <p:nvPr/>
-      </p:nvGrpSpPr>
-      <p:grpSpPr>
-        <a:xfrm>
-          <a:off x="0" y="0"/>
-          <a:ext cx="0" cy="0"/>
-          <a:chOff x="0" y="0"/>
-          <a:chExt cx="0" cy="0"/>
-        </a:xfrm>
-      </p:grpSpPr>
-      <p:sp>
-        <p:nvSpPr>
-          <p:cNvPr id="2" name="Tijdelijke aanduiding voor dia-afbeelding 1">
-            <a:extLst>
-              <a:ext uri="{FF2B5EF4-FFF2-40B4-BE49-F238E27FC236}">
-                <a16:creationId xmlns:a16="http://schemas.microsoft.com/office/drawing/2014/main" id="{B6FEF0C5-A148-A849-28C5-4772C23B6AF3}"/>
-              </a:ext>
-            </a:extLst>
-          </p:cNvPr>
-          <p:cNvSpPr>
-            <a:spLocks noGrp="1" noRot="1" noChangeAspect="1"/>
-          </p:cNvSpPr>
-          <p:nvPr>
-            <p:ph type="sldImg"/>
-          </p:nvPr>
-        </p:nvSpPr>
-        <p:spPr/>
-      </p:sp>
-      <p:sp>
-        <p:nvSpPr>
-          <p:cNvPr id="3" name="Tijdelijke aanduiding voor notities 2">
-            <a:extLst>
-              <a:ext uri="{FF2B5EF4-FFF2-40B4-BE49-F238E27FC236}">
-                <a16:creationId xmlns:a16="http://schemas.microsoft.com/office/drawing/2014/main" id="{DDA65D7C-AAF2-FB83-F17E-76470A5B9D37}"/>
-              </a:ext>
-            </a:extLst>
-          </p:cNvPr>
-          <p:cNvSpPr>
-            <a:spLocks noGrp="1"/>
-          </p:cNvSpPr>
-          <p:nvPr>
-            <p:ph type="body" idx="1"/>
-          </p:nvPr>
-        </p:nvSpPr>
-        <p:spPr/>
-        <p:txBody>
-          <a:bodyPr/>
-          <a:lstStyle/>
-          <a:p>
-            <a:r>
-              <a:rPr lang="nl-NL" sz="1200" b="1" kern="1200" dirty="0">
-                <a:solidFill>
-                  <a:schemeClr val="tx1"/>
-                </a:solidFill>
-                <a:effectLst/>
-                <a:latin typeface="Arial" charset="0"/>
-                <a:ea typeface="MS PGothic" panose="020B0600070205080204" pitchFamily="34" charset="-128"/>
-                <a:cs typeface="+mn-cs"/>
-              </a:rPr>
-              <a:t>LET OP: pak de juiste slide erbij</a:t>
-            </a:r>
-          </a:p>
-          <a:p>
-            <a:endParaRPr lang="nl-NL" sz="1200" b="1" kern="1200" dirty="0">
-              <a:solidFill>
-                <a:schemeClr val="tx1"/>
-              </a:solidFill>
-              <a:effectLst/>
-              <a:latin typeface="Arial" charset="0"/>
-              <a:ea typeface="MS PGothic" panose="020B0600070205080204" pitchFamily="34" charset="-128"/>
-              <a:cs typeface="+mn-cs"/>
-            </a:endParaRPr>
-          </a:p>
-          <a:p>
-            <a:r>
-              <a:rPr lang="nl-NL" sz="1200" b="1" kern="1200" dirty="0">
-                <a:solidFill>
-                  <a:schemeClr val="tx1"/>
-                </a:solidFill>
-                <a:effectLst/>
-                <a:latin typeface="Arial" charset="0"/>
-                <a:ea typeface="MS PGothic" panose="020B0600070205080204" pitchFamily="34" charset="-128"/>
-                <a:cs typeface="+mn-cs"/>
-              </a:rPr>
-              <a:t>Vragen bedenken</a:t>
-            </a:r>
-            <a:endParaRPr lang="nl-NL" sz="1200" b="0" kern="1200" dirty="0">
-              <a:solidFill>
-                <a:schemeClr val="tx1"/>
-              </a:solidFill>
-              <a:effectLst/>
-              <a:latin typeface="Arial" charset="0"/>
-              <a:ea typeface="MS PGothic" panose="020B0600070205080204" pitchFamily="34" charset="-128"/>
-              <a:cs typeface="+mn-cs"/>
-            </a:endParaRPr>
-          </a:p>
-          <a:p>
-            <a:r>
-              <a:rPr lang="nl-NL" sz="1200" kern="1200" dirty="0">
-                <a:solidFill>
-                  <a:schemeClr val="tx1"/>
-                </a:solidFill>
-                <a:effectLst/>
-                <a:latin typeface="Arial" charset="0"/>
-                <a:ea typeface="MS PGothic" panose="020B0600070205080204" pitchFamily="34" charset="-128"/>
-                <a:cs typeface="+mn-cs"/>
-              </a:rPr>
-              <a:t>Student</a:t>
-            </a:r>
-          </a:p>
-          <a:p>
-            <a:r>
-              <a:rPr lang="nl-NL" sz="1200" kern="1200" dirty="0">
-                <a:solidFill>
-                  <a:schemeClr val="tx1"/>
-                </a:solidFill>
-                <a:effectLst/>
-                <a:latin typeface="Arial" charset="0"/>
-                <a:ea typeface="MS PGothic" panose="020B0600070205080204" pitchFamily="34" charset="-128"/>
-                <a:cs typeface="+mn-cs"/>
-              </a:rPr>
-              <a:t>Studenten gaan met de experts van de groepjes per richting bij elkaar zitten en bedenken minimaal 3 vragen voor de desbetreffende afstudeerrichting. Als er een vraag is voor een andere afstudeerrichting dan waar je in zit mag deze aan die richting gegeven worden.</a:t>
-            </a:r>
-          </a:p>
-          <a:p>
-            <a:r>
-              <a:rPr lang="nl-NL" sz="1200" kern="1200" dirty="0">
-                <a:solidFill>
-                  <a:schemeClr val="tx1"/>
-                </a:solidFill>
-                <a:effectLst/>
-                <a:latin typeface="Arial" charset="0"/>
-                <a:ea typeface="MS PGothic" panose="020B0600070205080204" pitchFamily="34" charset="-128"/>
-                <a:cs typeface="+mn-cs"/>
-              </a:rPr>
-              <a:t>Probeer de vragen te categoriseren</a:t>
-            </a:r>
-          </a:p>
-          <a:p>
-            <a:r>
-              <a:rPr lang="nl-NL" sz="1200" kern="1200" dirty="0">
-                <a:solidFill>
-                  <a:schemeClr val="tx1"/>
-                </a:solidFill>
-                <a:effectLst/>
-                <a:latin typeface="Arial" charset="0"/>
-                <a:ea typeface="MS PGothic" panose="020B0600070205080204" pitchFamily="34" charset="-128"/>
-                <a:cs typeface="+mn-cs"/>
-              </a:rPr>
-              <a:t>Elk groepje is verantwoordelijk voor de vragen van een richting.</a:t>
-            </a:r>
-          </a:p>
-          <a:p>
-            <a:r>
-              <a:rPr lang="nl-NL" sz="1200" kern="1200" dirty="0">
-                <a:solidFill>
-                  <a:schemeClr val="tx1"/>
-                </a:solidFill>
-                <a:effectLst/>
-                <a:latin typeface="Arial" charset="0"/>
-                <a:ea typeface="MS PGothic" panose="020B0600070205080204" pitchFamily="34" charset="-128"/>
-                <a:cs typeface="+mn-cs"/>
-              </a:rPr>
-              <a:t>Studenten mogen natuurlijk ook spontaan vragen stellen.</a:t>
-            </a:r>
-            <a:endParaRPr lang="nl-NL" dirty="0"/>
-          </a:p>
-          <a:p>
-            <a:endParaRPr lang="nl-NL" dirty="0"/>
-          </a:p>
-        </p:txBody>
-      </p:sp>
-      <p:sp>
-        <p:nvSpPr>
-          <p:cNvPr id="4" name="Tijdelijke aanduiding voor dianummer 3">
-            <a:extLst>
-              <a:ext uri="{FF2B5EF4-FFF2-40B4-BE49-F238E27FC236}">
-                <a16:creationId xmlns:a16="http://schemas.microsoft.com/office/drawing/2014/main" id="{82546A6B-7AB6-9E2D-1A81-E9D11695FC49}"/>
-              </a:ext>
-            </a:extLst>
-          </p:cNvPr>
-          <p:cNvSpPr>
-            <a:spLocks noGrp="1"/>
-          </p:cNvSpPr>
-          <p:nvPr>
-            <p:ph type="sldNum" sz="quarter" idx="5"/>
-          </p:nvPr>
-        </p:nvSpPr>
-        <p:spPr/>
-        <p:txBody>
-          <a:bodyPr/>
-          <a:lstStyle/>
-          <a:p>
-            <a:fld id="{25AFEC66-6BFA-9A4F-8C14-93D2FB19A680}" type="slidenum">
-              <a:rPr lang="nl-NL" smtClean="0"/>
-              <a:t>6</a:t>
-            </a:fld>
-            <a:endParaRPr lang="nl-NL"/>
-          </a:p>
-        </p:txBody>
-      </p:sp>
-    </p:spTree>
-    <p:extLst>
-      <p:ext uri="{BB962C8B-B14F-4D97-AF65-F5344CB8AC3E}">
-        <p14:creationId xmlns:p14="http://schemas.microsoft.com/office/powerpoint/2010/main" val="570305263"/>
-      </p:ext>
-    </p:extLst>
-  </p:cSld>
-  <p:clrMapOvr>
-    <a:masterClrMapping/>
-  </p:clrMapOvr>
-</p:notes>
-</file>
-
-<file path=ppt/notesSlides/notesSlide7.xml><?xml version="1.0" encoding="utf-8"?>
 <p:notes xmlns:a="http://schemas.openxmlformats.org/drawingml/2006/main" xmlns:r="http://schemas.openxmlformats.org/officeDocument/2006/relationships" xmlns:p="http://schemas.openxmlformats.org/presentationml/2006/main">
   <p:cSld>
     <p:spTree>
@@ -3047,7 +2507,7 @@
           <a:p>
             <a:fld id="{25AFEC66-6BFA-9A4F-8C14-93D2FB19A680}" type="slidenum">
               <a:rPr lang="nl-NL" smtClean="0"/>
-              <a:t>7</a:t>
+              <a:t>5</a:t>
             </a:fld>
             <a:endParaRPr lang="nl-NL"/>
           </a:p>
@@ -3144,7 +2604,7 @@
           <a:p>
             <a:fld id="{6FBE2429-3394-4D2F-AD24-5EABA86125D2}" type="datetime1">
               <a:rPr lang="en-US" smtClean="0"/>
-              <a:t>5/4/2026</a:t>
+              <a:t>5/12/2026</a:t>
             </a:fld>
             <a:endParaRPr lang="nl-NL"/>
           </a:p>
@@ -3213,7 +2673,7 @@
             <a:fld id="{82F1406F-2017-4431-B79A-7DFC81A4E36B}" type="slidenum">
               <a:rPr lang="nl-NL" smtClean="0"/>
               <a:pPr/>
-              <a:t>‹#›</a:t>
+              <a:t>‹nr.›</a:t>
             </a:fld>
             <a:endParaRPr lang="nl-NL"/>
           </a:p>
@@ -3469,7 +2929,7 @@
           <a:p>
             <a:fld id="{16734E01-D590-442B-B31B-FE10FED18193}" type="datetime1">
               <a:rPr lang="en-US" smtClean="0"/>
-              <a:t>5/4/2026</a:t>
+              <a:t>5/12/2026</a:t>
             </a:fld>
             <a:endParaRPr lang="nl-NL"/>
           </a:p>
@@ -3549,7 +3009,7 @@
             <a:fld id="{82F1406F-2017-4431-B79A-7DFC81A4E36B}" type="slidenum">
               <a:rPr lang="nl-NL" smtClean="0"/>
               <a:pPr/>
-              <a:t>‹#›</a:t>
+              <a:t>‹nr.›</a:t>
             </a:fld>
             <a:endParaRPr lang="nl-NL"/>
           </a:p>
@@ -3807,7 +3267,7 @@
           <a:p>
             <a:fld id="{56AB6A4D-1945-47DE-BAFF-682D7CF56FF2}" type="datetime1">
               <a:rPr lang="en-US" smtClean="0"/>
-              <a:t>5/4/2026</a:t>
+              <a:t>5/12/2026</a:t>
             </a:fld>
             <a:endParaRPr lang="nl-NL"/>
           </a:p>
@@ -3866,7 +3326,7 @@
             <a:fld id="{82F1406F-2017-4431-B79A-7DFC81A4E36B}" type="slidenum">
               <a:rPr lang="nl-NL" smtClean="0"/>
               <a:pPr/>
-              <a:t>‹#›</a:t>
+              <a:t>‹nr.›</a:t>
             </a:fld>
             <a:endParaRPr lang="nl-NL"/>
           </a:p>
@@ -4163,7 +3623,7 @@
           <a:p>
             <a:fld id="{AE5C9FBB-E996-401B-A15A-B30463621E74}" type="datetime1">
               <a:rPr lang="en-US" smtClean="0"/>
-              <a:t>5/4/2026</a:t>
+              <a:t>5/12/2026</a:t>
             </a:fld>
             <a:endParaRPr lang="nl-NL"/>
           </a:p>
@@ -4222,7 +3682,7 @@
             <a:fld id="{82F1406F-2017-4431-B79A-7DFC81A4E36B}" type="slidenum">
               <a:rPr lang="nl-NL" smtClean="0"/>
               <a:pPr/>
-              <a:t>‹#›</a:t>
+              <a:t>‹nr.›</a:t>
             </a:fld>
             <a:endParaRPr lang="nl-NL"/>
           </a:p>
@@ -4409,7 +3869,7 @@
           <a:p>
             <a:fld id="{A1D86A16-1316-40EA-ACBE-8B2631E6FF9F}" type="datetime1">
               <a:rPr lang="en-US" smtClean="0"/>
-              <a:t>5/4/2026</a:t>
+              <a:t>5/12/2026</a:t>
             </a:fld>
             <a:endParaRPr lang="nl-NL"/>
           </a:p>
@@ -4484,7 +3944,7 @@
             <a:fld id="{82F1406F-2017-4431-B79A-7DFC81A4E36B}" type="slidenum">
               <a:rPr lang="nl-NL" smtClean="0"/>
               <a:pPr/>
-              <a:t>‹#›</a:t>
+              <a:t>‹nr.›</a:t>
             </a:fld>
             <a:endParaRPr lang="nl-NL"/>
           </a:p>
@@ -4767,7 +4227,7 @@
           <a:p>
             <a:fld id="{2411F2CB-B58B-4B3B-99BD-F8BF469ACBEE}" type="datetime1">
               <a:rPr lang="en-US" smtClean="0"/>
-              <a:t>5/4/2026</a:t>
+              <a:t>5/12/2026</a:t>
             </a:fld>
             <a:endParaRPr lang="nl-NL"/>
           </a:p>
@@ -4826,7 +4286,7 @@
             <a:fld id="{82F1406F-2017-4431-B79A-7DFC81A4E36B}" type="slidenum">
               <a:rPr lang="nl-NL" smtClean="0"/>
               <a:pPr/>
-              <a:t>‹#›</a:t>
+              <a:t>‹nr.›</a:t>
             </a:fld>
             <a:endParaRPr lang="nl-NL"/>
           </a:p>
@@ -5044,7 +4504,7 @@
           <a:p>
             <a:fld id="{9ABD780B-88DC-493B-A593-4A4CB2D84C3B}" type="datetime1">
               <a:rPr lang="en-US" smtClean="0"/>
-              <a:t>5/4/2026</a:t>
+              <a:t>5/12/2026</a:t>
             </a:fld>
             <a:endParaRPr lang="nl-NL"/>
           </a:p>
@@ -5119,7 +4579,7 @@
             <a:fld id="{82F1406F-2017-4431-B79A-7DFC81A4E36B}" type="slidenum">
               <a:rPr lang="nl-NL" smtClean="0"/>
               <a:pPr/>
-              <a:t>‹#›</a:t>
+              <a:t>‹nr.›</a:t>
             </a:fld>
             <a:endParaRPr lang="nl-NL"/>
           </a:p>
@@ -5370,7 +4830,7 @@
           <a:p>
             <a:fld id="{619B05D6-86B8-4218-9682-953FF99C49E4}" type="datetime1">
               <a:rPr lang="en-US" smtClean="0"/>
-              <a:t>5/4/2026</a:t>
+              <a:t>5/12/2026</a:t>
             </a:fld>
             <a:endParaRPr lang="nl-NL"/>
           </a:p>
@@ -5429,7 +4889,7 @@
             <a:fld id="{82F1406F-2017-4431-B79A-7DFC81A4E36B}" type="slidenum">
               <a:rPr lang="nl-NL" smtClean="0"/>
               <a:pPr/>
-              <a:t>‹#›</a:t>
+              <a:t>‹nr.›</a:t>
             </a:fld>
             <a:endParaRPr lang="nl-NL"/>
           </a:p>
@@ -5617,7 +5077,7 @@
           <a:p>
             <a:fld id="{96E4080C-BA09-4263-8B37-85DB698DA235}" type="datetime1">
               <a:rPr lang="en-US" smtClean="0"/>
-              <a:t>5/4/2026</a:t>
+              <a:t>5/12/2026</a:t>
             </a:fld>
             <a:endParaRPr lang="nl-NL"/>
           </a:p>
@@ -5692,7 +5152,7 @@
             <a:fld id="{82F1406F-2017-4431-B79A-7DFC81A4E36B}" type="slidenum">
               <a:rPr lang="nl-NL" smtClean="0"/>
               <a:pPr/>
-              <a:t>‹#›</a:t>
+              <a:t>‹nr.›</a:t>
             </a:fld>
             <a:endParaRPr lang="nl-NL"/>
           </a:p>
@@ -6258,7 +5718,7 @@
           <a:p>
             <a:fld id="{5E437D89-8F6D-4346-831F-8A669749D0AA}" type="datetime1">
               <a:rPr lang="en-US" smtClean="0"/>
-              <a:t>5/4/2026</a:t>
+              <a:t>5/12/2026</a:t>
             </a:fld>
             <a:endParaRPr lang="nl-NL"/>
           </a:p>
@@ -6333,7 +5793,7 @@
             <a:fld id="{82F1406F-2017-4431-B79A-7DFC81A4E36B}" type="slidenum">
               <a:rPr lang="nl-NL" smtClean="0"/>
               <a:pPr/>
-              <a:t>‹#›</a:t>
+              <a:t>‹nr.›</a:t>
             </a:fld>
             <a:endParaRPr lang="nl-NL"/>
           </a:p>
@@ -6430,7 +5890,7 @@
           <a:p>
             <a:fld id="{C64382B0-5218-4485-9784-F5CE4DEC3F99}" type="datetime1">
               <a:rPr lang="en-US" smtClean="0"/>
-              <a:t>5/4/2026</a:t>
+              <a:t>5/12/2026</a:t>
             </a:fld>
             <a:endParaRPr lang="nl-NL"/>
           </a:p>
@@ -6499,7 +5959,7 @@
             <a:fld id="{82F1406F-2017-4431-B79A-7DFC81A4E36B}" type="slidenum">
               <a:rPr lang="nl-NL" smtClean="0"/>
               <a:pPr/>
-              <a:t>‹#›</a:t>
+              <a:t>‹nr.›</a:t>
             </a:fld>
             <a:endParaRPr lang="nl-NL"/>
           </a:p>
@@ -6709,7 +6169,7 @@
           <a:p>
             <a:fld id="{4B202C83-CF6B-4CB4-A3C5-136B676E759A}" type="datetime1">
               <a:rPr lang="en-US" smtClean="0"/>
-              <a:t>5/4/2026</a:t>
+              <a:t>5/12/2026</a:t>
             </a:fld>
             <a:endParaRPr lang="nl-NL"/>
           </a:p>
@@ -6784,7 +6244,7 @@
             <a:fld id="{82F1406F-2017-4431-B79A-7DFC81A4E36B}" type="slidenum">
               <a:rPr lang="nl-NL" smtClean="0"/>
               <a:pPr/>
-              <a:t>‹#›</a:t>
+              <a:t>‹nr.›</a:t>
             </a:fld>
             <a:endParaRPr lang="nl-NL"/>
           </a:p>
@@ -6883,7 +6343,7 @@
           <a:p>
             <a:fld id="{63A86145-E806-4748-B60F-3B208FA67D04}" type="datetime1">
               <a:rPr lang="en-US" smtClean="0"/>
-              <a:t>5/4/2026</a:t>
+              <a:t>5/12/2026</a:t>
             </a:fld>
             <a:endParaRPr lang="nl-NL"/>
           </a:p>
@@ -6942,7 +6402,7 @@
             <a:fld id="{82F1406F-2017-4431-B79A-7DFC81A4E36B}" type="slidenum">
               <a:rPr lang="nl-NL" smtClean="0"/>
               <a:pPr/>
-              <a:t>‹#›</a:t>
+              <a:t>‹nr.›</a:t>
             </a:fld>
             <a:endParaRPr lang="nl-NL"/>
           </a:p>
@@ -7141,7 +6601,7 @@
           <a:p>
             <a:fld id="{9DC9F321-131A-4464-B26F-3DE164580998}" type="datetime1">
               <a:rPr lang="en-US" smtClean="0"/>
-              <a:t>5/4/2026</a:t>
+              <a:t>5/12/2026</a:t>
             </a:fld>
             <a:endParaRPr lang="en-US"/>
           </a:p>
@@ -7199,7 +6659,7 @@
           <a:p>
             <a:fld id="{378DF747-8C7E-42F0-ABD7-47587DAC082D}" type="slidenum">
               <a:rPr lang="en-US" smtClean="0"/>
-              <a:t>‹#›</a:t>
+              <a:t>‹nr.›</a:t>
             </a:fld>
             <a:endParaRPr lang="en-US"/>
           </a:p>
@@ -7365,7 +6825,7 @@
           <a:p>
             <a:fld id="{C6A87EB0-489E-4691-ADF0-E061285BBA69}" type="datetime1">
               <a:rPr lang="en-US" smtClean="0"/>
-              <a:t>5/4/2026</a:t>
+              <a:t>5/12/2026</a:t>
             </a:fld>
             <a:endParaRPr lang="en-US"/>
           </a:p>
@@ -7423,7 +6883,7 @@
           <a:p>
             <a:fld id="{378DF747-8C7E-42F0-ABD7-47587DAC082D}" type="slidenum">
               <a:rPr lang="en-US" smtClean="0"/>
-              <a:t>‹#›</a:t>
+              <a:t>‹nr.›</a:t>
             </a:fld>
             <a:endParaRPr lang="en-US"/>
           </a:p>
@@ -12581,7 +12041,7 @@
           <a:p>
             <a:fld id="{0F344198-347E-4968-8A5E-24FAF398C80A}" type="datetime1">
               <a:rPr lang="en-US" smtClean="0"/>
-              <a:t>5/4/2026</a:t>
+              <a:t>5/12/2026</a:t>
             </a:fld>
             <a:endParaRPr lang="nl-NL"/>
           </a:p>
@@ -12650,7 +12110,7 @@
             <a:fld id="{82F1406F-2017-4431-B79A-7DFC81A4E36B}" type="slidenum">
               <a:rPr lang="nl-NL" smtClean="0"/>
               <a:pPr/>
-              <a:t>‹#›</a:t>
+              <a:t>‹nr.›</a:t>
             </a:fld>
             <a:endParaRPr lang="nl-NL"/>
           </a:p>
@@ -12927,7 +12387,7 @@
           <a:p>
             <a:fld id="{E0F52BC7-4251-4386-84EB-B9E3042EAC7A}" type="datetime1">
               <a:rPr lang="en-US" smtClean="0"/>
-              <a:t>5/4/2026</a:t>
+              <a:t>5/12/2026</a:t>
             </a:fld>
             <a:endParaRPr lang="nl-NL"/>
           </a:p>
@@ -12996,7 +12456,7 @@
             <a:fld id="{82F1406F-2017-4431-B79A-7DFC81A4E36B}" type="slidenum">
               <a:rPr lang="nl-NL" smtClean="0"/>
               <a:pPr/>
-              <a:t>‹#›</a:t>
+              <a:t>‹nr.›</a:t>
             </a:fld>
             <a:endParaRPr lang="nl-NL"/>
           </a:p>
@@ -13229,7 +12689,7 @@
           <a:p>
             <a:fld id="{A09D2FD6-A4EA-47AF-92F4-E02146872DB1}" type="datetime1">
               <a:rPr lang="en-US" smtClean="0"/>
-              <a:t>5/4/2026</a:t>
+              <a:t>5/12/2026</a:t>
             </a:fld>
             <a:endParaRPr lang="nl-NL"/>
           </a:p>
@@ -13298,7 +12758,7 @@
             <a:fld id="{82F1406F-2017-4431-B79A-7DFC81A4E36B}" type="slidenum">
               <a:rPr lang="nl-NL" smtClean="0"/>
               <a:pPr/>
-              <a:t>‹#›</a:t>
+              <a:t>‹nr.›</a:t>
             </a:fld>
             <a:endParaRPr lang="nl-NL"/>
           </a:p>
@@ -13498,7 +12958,7 @@
           <a:p>
             <a:fld id="{1F2FEB28-E807-40A4-9055-525CD06B5082}" type="datetime1">
               <a:rPr lang="en-US" smtClean="0"/>
-              <a:t>5/4/2026</a:t>
+              <a:t>5/12/2026</a:t>
             </a:fld>
             <a:endParaRPr lang="nl-NL"/>
           </a:p>
@@ -13567,7 +13027,7 @@
             <a:fld id="{82F1406F-2017-4431-B79A-7DFC81A4E36B}" type="slidenum">
               <a:rPr lang="nl-NL" smtClean="0"/>
               <a:pPr/>
-              <a:t>‹#›</a:t>
+              <a:t>‹nr.›</a:t>
             </a:fld>
             <a:endParaRPr lang="nl-NL"/>
           </a:p>
@@ -13642,7 +13102,7 @@
           <a:p>
             <a:fld id="{AE9478F3-55F5-463C-8DD4-17D1FC1FACF4}" type="datetime1">
               <a:rPr lang="en-US" smtClean="0"/>
-              <a:t>5/4/2026</a:t>
+              <a:t>5/12/2026</a:t>
             </a:fld>
             <a:endParaRPr lang="nl-NL"/>
           </a:p>
@@ -13711,7 +13171,7 @@
             <a:fld id="{82F1406F-2017-4431-B79A-7DFC81A4E36B}" type="slidenum">
               <a:rPr lang="nl-NL" smtClean="0"/>
               <a:pPr/>
-              <a:t>‹#›</a:t>
+              <a:t>‹nr.›</a:t>
             </a:fld>
             <a:endParaRPr lang="nl-NL"/>
           </a:p>
@@ -13840,7 +13300,7 @@
             <a:fld id="{82F1406F-2017-4431-B79A-7DFC81A4E36B}" type="slidenum">
               <a:rPr lang="nl-NL" smtClean="0"/>
               <a:pPr/>
-              <a:t>‹#›</a:t>
+              <a:t>‹nr.›</a:t>
             </a:fld>
             <a:endParaRPr lang="nl-NL"/>
           </a:p>
@@ -13924,7 +13384,7 @@
           <a:p>
             <a:fld id="{D1E44E4F-F209-4BD9-8EDA-84907311B367}" type="datetime1">
               <a:rPr lang="en-US" smtClean="0"/>
-              <a:t>5/4/2026</a:t>
+              <a:t>5/12/2026</a:t>
             </a:fld>
             <a:endParaRPr lang="nl-NL"/>
           </a:p>
@@ -14189,7 +13649,7 @@
           <a:p>
             <a:fld id="{52DBBD6E-4801-4C8F-8ED0-C2AF858A61AA}" type="datetime1">
               <a:rPr lang="en-US" smtClean="0"/>
-              <a:t>5/4/2026</a:t>
+              <a:t>5/12/2026</a:t>
             </a:fld>
             <a:endParaRPr lang="nl-NL"/>
           </a:p>
@@ -14274,7 +13734,7 @@
             <a:fld id="{82F1406F-2017-4431-B79A-7DFC81A4E36B}" type="slidenum">
               <a:rPr lang="nl-NL" smtClean="0"/>
               <a:pPr/>
-              <a:t>‹#›</a:t>
+              <a:t>‹nr.›</a:t>
             </a:fld>
             <a:endParaRPr lang="nl-NL"/>
           </a:p>
@@ -14515,7 +13975,7 @@
           <a:p>
             <a:fld id="{E0E16A3F-A479-45AB-8C66-C5C1FECFE81B}" type="datetime1">
               <a:rPr lang="en-US" smtClean="0"/>
-              <a:t>5/4/2026</a:t>
+              <a:t>5/12/2026</a:t>
             </a:fld>
             <a:endParaRPr lang="nl-NL"/>
           </a:p>
@@ -14610,7 +14070,7 @@
             <a:fld id="{82F1406F-2017-4431-B79A-7DFC81A4E36B}" type="slidenum">
               <a:rPr lang="nl-NL" smtClean="0"/>
               <a:pPr/>
-              <a:t>‹#›</a:t>
+              <a:t>‹nr.›</a:t>
             </a:fld>
             <a:endParaRPr lang="nl-NL"/>
           </a:p>
@@ -15389,12 +14849,21 @@
         </p:nvSpPr>
         <p:spPr/>
         <p:txBody>
-          <a:bodyPr/>
+          <a:bodyPr>
+            <a:normAutofit fontScale="90000"/>
+          </a:bodyPr>
           <a:lstStyle/>
           <a:p>
             <a:r>
               <a:rPr lang="nl-NL" dirty="0"/>
-              <a:t>Programma V1P 5.034</a:t>
+              <a:t>Programma V1P/V1R 5.034</a:t>
+            </a:r>
+            <a:br>
+              <a:rPr lang="nl-NL" dirty="0"/>
+            </a:br>
+            <a:r>
+              <a:rPr lang="nl-NL" dirty="0"/>
+              <a:t>(Jan Halsema voor de klas)</a:t>
             </a:r>
           </a:p>
         </p:txBody>
@@ -15849,7 +15318,7 @@
         <p:cNvPr id="1" name="">
           <a:extLst>
             <a:ext uri="{FF2B5EF4-FFF2-40B4-BE49-F238E27FC236}">
-              <a16:creationId xmlns:a16="http://schemas.microsoft.com/office/drawing/2014/main" id="{704D4216-938B-C1F7-F7ED-43E825EB33DA}"/>
+              <a16:creationId xmlns:a16="http://schemas.microsoft.com/office/drawing/2014/main" id="{66468DAB-5458-C0BC-2E2B-CA40CDB60994}"/>
             </a:ext>
           </a:extLst>
         </p:cNvPr>
@@ -15869,7 +15338,7 @@
           <p:cNvPr id="5" name="Titel 4">
             <a:extLst>
               <a:ext uri="{FF2B5EF4-FFF2-40B4-BE49-F238E27FC236}">
-                <a16:creationId xmlns:a16="http://schemas.microsoft.com/office/drawing/2014/main" id="{ADDFBFE9-AC71-D834-6541-0DB82919EA4F}"/>
+                <a16:creationId xmlns:a16="http://schemas.microsoft.com/office/drawing/2014/main" id="{49A2D266-FBF1-3F13-1CFC-2CEA793AF1ED}"/>
               </a:ext>
             </a:extLst>
           </p:cNvPr>
@@ -15882,13 +15351,27 @@
         </p:nvSpPr>
         <p:spPr/>
         <p:txBody>
-          <a:bodyPr/>
+          <a:bodyPr>
+            <a:normAutofit fontScale="90000"/>
+          </a:bodyPr>
           <a:lstStyle/>
           <a:p>
             <a:r>
               <a:rPr lang="nl-NL" dirty="0"/>
-              <a:t>Programma V1R 5.036</a:t>
-            </a:r>
+              <a:t>Programma V1S 5.038</a:t>
+            </a:r>
+            <a:br>
+              <a:rPr lang="nl-NL" dirty="0"/>
+            </a:br>
+            <a:r>
+              <a:rPr lang="nl-NL" dirty="0"/>
+              <a:t>(</a:t>
+            </a:r>
+            <a:r>
+              <a:rPr lang="nl-NL"/>
+              <a:t>Gerald Ovink voor de klas)</a:t>
+            </a:r>
+            <a:endParaRPr lang="nl-NL" dirty="0"/>
           </a:p>
         </p:txBody>
       </p:sp>
@@ -15897,7 +15380,7 @@
           <p:cNvPr id="6" name="Tijdelijke aanduiding voor inhoud 5">
             <a:extLst>
               <a:ext uri="{FF2B5EF4-FFF2-40B4-BE49-F238E27FC236}">
-                <a16:creationId xmlns:a16="http://schemas.microsoft.com/office/drawing/2014/main" id="{9FDE74DD-FEB7-B191-008D-3E74B587A252}"/>
+                <a16:creationId xmlns:a16="http://schemas.microsoft.com/office/drawing/2014/main" id="{7CDA7A85-2BAD-EED3-14C7-6A956CBC70D1}"/>
               </a:ext>
             </a:extLst>
           </p:cNvPr>
@@ -15911,12 +15394,12 @@
         <p:spPr>
           <a:xfrm>
             <a:off x="971551" y="1797051"/>
-            <a:ext cx="8364809" cy="4080933"/>
+            <a:ext cx="8364809" cy="4368253"/>
           </a:xfrm>
         </p:spPr>
         <p:txBody>
           <a:bodyPr>
-            <a:normAutofit/>
+            <a:normAutofit lnSpcReduction="10000"/>
           </a:bodyPr>
           <a:lstStyle/>
           <a:p>
@@ -15983,22 +15466,28 @@
             </a:pPr>
             <a:r>
               <a:rPr lang="nl-NL" dirty="0"/>
-              <a:t>15:15 – 16:00	Werken aan </a:t>
-            </a:r>
-            <a:r>
-              <a:rPr lang="nl-NL" dirty="0" err="1"/>
-              <a:t>Steam</a:t>
-            </a:r>
-            <a:endParaRPr lang="nl-NL" dirty="0"/>
+              <a:t>15:15 – 16:00	Werken aan Steam</a:t>
+            </a:r>
           </a:p>
           <a:p>
             <a:pPr marL="0" indent="0">
               <a:buNone/>
             </a:pPr>
             <a:r>
+              <a:rPr lang="nl-NL" b="1" dirty="0"/>
+              <a:t>Huiswerk</a:t>
+            </a:r>
+            <a:r>
               <a:rPr lang="nl-NL" dirty="0"/>
-              <a:t> </a:t>
-            </a:r>
+              <a:t>: verwerk opgedane kennis in Oriëntatieopdracht</a:t>
+            </a:r>
+            <a:endParaRPr lang="nl-NL" b="1" dirty="0"/>
+          </a:p>
+          <a:p>
+            <a:pPr marL="0" indent="0">
+              <a:buNone/>
+            </a:pPr>
+            <a:endParaRPr lang="nl-NL" dirty="0"/>
           </a:p>
         </p:txBody>
       </p:sp>
@@ -16007,270 +15496,7 @@
           <p:cNvPr id="7" name="Picture 2" descr="http://gbw-online.nl/wp-content/uploads/2015/02/agenda-stylo.jpg">
             <a:extLst>
               <a:ext uri="{FF2B5EF4-FFF2-40B4-BE49-F238E27FC236}">
-                <a16:creationId xmlns:a16="http://schemas.microsoft.com/office/drawing/2014/main" id="{865940DB-9F91-C525-E42B-737E00AC488B}"/>
-              </a:ext>
-            </a:extLst>
-          </p:cNvPr>
-          <p:cNvPicPr>
-            <a:picLocks noChangeAspect="1" noChangeArrowheads="1"/>
-          </p:cNvPicPr>
-          <p:nvPr/>
-        </p:nvPicPr>
-        <p:blipFill rotWithShape="1">
-          <a:blip r:embed="rId3" cstate="print">
-            <a:extLst>
-              <a:ext uri="{28A0092B-C50C-407E-A947-70E740481C1C}">
-                <a14:useLocalDpi xmlns:a14="http://schemas.microsoft.com/office/drawing/2010/main" val="0"/>
-              </a:ext>
-            </a:extLst>
-          </a:blip>
-          <a:srcRect l="30704"/>
-          <a:stretch/>
-        </p:blipFill>
-        <p:spPr bwMode="auto">
-          <a:xfrm>
-            <a:off x="9439722" y="-10929"/>
-            <a:ext cx="2752279" cy="2647841"/>
-          </a:xfrm>
-          <a:prstGeom prst="rect">
-            <a:avLst/>
-          </a:prstGeom>
-          <a:noFill/>
-          <a:extLst>
-            <a:ext uri="{909E8E84-426E-40DD-AFC4-6F175D3DCCD1}">
-              <a14:hiddenFill xmlns:a14="http://schemas.microsoft.com/office/drawing/2010/main">
-                <a:solidFill>
-                  <a:srgbClr val="FFFFFF"/>
-                </a:solidFill>
-              </a14:hiddenFill>
-            </a:ext>
-          </a:extLst>
-        </p:spPr>
-      </p:pic>
-    </p:spTree>
-    <p:extLst>
-      <p:ext uri="{BB962C8B-B14F-4D97-AF65-F5344CB8AC3E}">
-        <p14:creationId xmlns:p14="http://schemas.microsoft.com/office/powerpoint/2010/main" val="1121217387"/>
-      </p:ext>
-    </p:extLst>
-  </p:cSld>
-  <p:clrMapOvr>
-    <a:masterClrMapping/>
-  </p:clrMapOvr>
-</p:sld>
-</file>
-
-<file path=ppt/slides/slide5.xml><?xml version="1.0" encoding="utf-8"?>
-<p:sld xmlns:a="http://schemas.openxmlformats.org/drawingml/2006/main" xmlns:r="http://schemas.openxmlformats.org/officeDocument/2006/relationships" xmlns:p="http://schemas.openxmlformats.org/presentationml/2006/main">
-  <p:cSld>
-    <p:spTree>
-      <p:nvGrpSpPr>
-        <p:cNvPr id="1" name="">
-          <a:extLst>
-            <a:ext uri="{FF2B5EF4-FFF2-40B4-BE49-F238E27FC236}">
-              <a16:creationId xmlns:a16="http://schemas.microsoft.com/office/drawing/2014/main" id="{727DEB44-93A1-3ABE-7EBB-BBD387CFFB40}"/>
-            </a:ext>
-          </a:extLst>
-        </p:cNvPr>
-        <p:cNvGrpSpPr/>
-        <p:nvPr/>
-      </p:nvGrpSpPr>
-      <p:grpSpPr>
-        <a:xfrm>
-          <a:off x="0" y="0"/>
-          <a:ext cx="0" cy="0"/>
-          <a:chOff x="0" y="0"/>
-          <a:chExt cx="0" cy="0"/>
-        </a:xfrm>
-      </p:grpSpPr>
-      <p:sp>
-        <p:nvSpPr>
-          <p:cNvPr id="5" name="Titel 4">
-            <a:extLst>
-              <a:ext uri="{FF2B5EF4-FFF2-40B4-BE49-F238E27FC236}">
-                <a16:creationId xmlns:a16="http://schemas.microsoft.com/office/drawing/2014/main" id="{CEE7CDC7-6D1D-1E8C-D7C2-CA511AFB83DB}"/>
-              </a:ext>
-            </a:extLst>
-          </p:cNvPr>
-          <p:cNvSpPr>
-            <a:spLocks noGrp="1"/>
-          </p:cNvSpPr>
-          <p:nvPr>
-            <p:ph type="title"/>
-          </p:nvPr>
-        </p:nvSpPr>
-        <p:spPr/>
-        <p:txBody>
-          <a:bodyPr/>
-          <a:lstStyle/>
-          <a:p>
-            <a:r>
-              <a:rPr lang="nl-NL" dirty="0"/>
-              <a:t>Vragen bedenken</a:t>
-            </a:r>
-          </a:p>
-        </p:txBody>
-      </p:sp>
-      <p:sp>
-        <p:nvSpPr>
-          <p:cNvPr id="6" name="Tijdelijke aanduiding voor inhoud 5">
-            <a:extLst>
-              <a:ext uri="{FF2B5EF4-FFF2-40B4-BE49-F238E27FC236}">
-                <a16:creationId xmlns:a16="http://schemas.microsoft.com/office/drawing/2014/main" id="{999ABBC8-7107-502B-5EDA-36AAFD566F3D}"/>
-              </a:ext>
-            </a:extLst>
-          </p:cNvPr>
-          <p:cNvSpPr>
-            <a:spLocks noGrp="1"/>
-          </p:cNvSpPr>
-          <p:nvPr>
-            <p:ph sz="quarter" idx="15"/>
-          </p:nvPr>
-        </p:nvSpPr>
-        <p:spPr>
-          <a:xfrm>
-            <a:off x="971551" y="1484784"/>
-            <a:ext cx="8364809" cy="5184577"/>
-          </a:xfrm>
-        </p:spPr>
-        <p:txBody>
-          <a:bodyPr>
-            <a:normAutofit fontScale="85000" lnSpcReduction="10000"/>
-          </a:bodyPr>
-          <a:lstStyle/>
-          <a:p>
-            <a:r>
-              <a:rPr lang="en-US" dirty="0"/>
-              <a:t>Vorm 5 </a:t>
-            </a:r>
-            <a:r>
-              <a:rPr lang="en-US" dirty="0" err="1"/>
-              <a:t>groepjes</a:t>
-            </a:r>
-            <a:r>
-              <a:rPr lang="en-US" dirty="0"/>
-              <a:t> </a:t>
-            </a:r>
-            <a:r>
-              <a:rPr lang="en-US" dirty="0" err="1"/>
-              <a:t>bestaande</a:t>
-            </a:r>
-            <a:r>
-              <a:rPr lang="en-US" dirty="0"/>
-              <a:t> </a:t>
-            </a:r>
-            <a:r>
-              <a:rPr lang="en-US" dirty="0" err="1"/>
-              <a:t>uit</a:t>
-            </a:r>
-            <a:r>
-              <a:rPr lang="en-US" dirty="0"/>
-              <a:t> </a:t>
-            </a:r>
-            <a:r>
-              <a:rPr lang="en-US" dirty="0" err="1"/>
-              <a:t>studenten</a:t>
-            </a:r>
-            <a:r>
-              <a:rPr lang="en-US" dirty="0"/>
-              <a:t> met </a:t>
-            </a:r>
-            <a:r>
-              <a:rPr lang="en-US" dirty="0" err="1"/>
-              <a:t>dezelfde</a:t>
-            </a:r>
-            <a:r>
-              <a:rPr lang="en-US" dirty="0"/>
-              <a:t> </a:t>
-            </a:r>
-            <a:r>
-              <a:rPr lang="en-US" dirty="0" err="1"/>
-              <a:t>rol</a:t>
-            </a:r>
-            <a:r>
-              <a:rPr lang="en-US" dirty="0"/>
-              <a:t> </a:t>
-            </a:r>
-            <a:r>
-              <a:rPr lang="en-US" dirty="0" err="1"/>
-              <a:t>binnen</a:t>
-            </a:r>
-            <a:r>
-              <a:rPr lang="en-US" dirty="0"/>
-              <a:t> het Steam project</a:t>
-            </a:r>
-            <a:endParaRPr lang="nl-NL" dirty="0"/>
-          </a:p>
-          <a:p>
-            <a:r>
-              <a:rPr lang="nl-NL" dirty="0"/>
-              <a:t>Groep 1: alle AI-experts</a:t>
-            </a:r>
-          </a:p>
-          <a:p>
-            <a:r>
-              <a:rPr lang="nl-NL" dirty="0"/>
-              <a:t>Groep 2: alle BIM-experts</a:t>
-            </a:r>
-          </a:p>
-          <a:p>
-            <a:r>
-              <a:rPr lang="nl-NL" dirty="0"/>
-              <a:t>Groep 3: alle SD-experts</a:t>
-            </a:r>
-          </a:p>
-          <a:p>
-            <a:r>
-              <a:rPr lang="nl-NL" dirty="0"/>
-              <a:t>Groep 4: alle TI-experts</a:t>
-            </a:r>
-          </a:p>
-          <a:p>
-            <a:r>
-              <a:rPr lang="nl-NL" dirty="0"/>
-              <a:t>Groep 5: alle CSC-experts</a:t>
-            </a:r>
-          </a:p>
-          <a:p>
-            <a:r>
-              <a:rPr lang="nl-NL" dirty="0"/>
-              <a:t>Dit hoeft niet overeen te komen met jouw voorkeur</a:t>
-            </a:r>
-          </a:p>
-          <a:p>
-            <a:r>
-              <a:rPr lang="nl-NL" dirty="0"/>
-              <a:t>Elke groep bedenkt voor de genoemde afstudeerrichting minimaal </a:t>
-            </a:r>
-            <a:r>
-              <a:rPr lang="nl-NL" b="1" dirty="0"/>
-              <a:t>3</a:t>
-            </a:r>
-            <a:r>
-              <a:rPr lang="nl-NL" dirty="0"/>
-              <a:t> inhoudelijke vragen</a:t>
-            </a:r>
-          </a:p>
-          <a:p>
-            <a:r>
-              <a:rPr lang="nl-NL" dirty="0"/>
-              <a:t>Heb je vragen over een andere afstudeerrichting, dan geef je deze aan de desbetreffende groep.</a:t>
-            </a:r>
-          </a:p>
-          <a:p>
-            <a:r>
-              <a:rPr lang="nl-NL" b="1" dirty="0"/>
-              <a:t>Bewaar de vragen voor SD, AI en BIM voor morgen!</a:t>
-            </a:r>
-          </a:p>
-        </p:txBody>
-      </p:sp>
-      <p:pic>
-        <p:nvPicPr>
-          <p:cNvPr id="7" name="Picture 2" descr="http://gbw-online.nl/wp-content/uploads/2015/02/agenda-stylo.jpg">
-            <a:extLst>
-              <a:ext uri="{FF2B5EF4-FFF2-40B4-BE49-F238E27FC236}">
-                <a16:creationId xmlns:a16="http://schemas.microsoft.com/office/drawing/2014/main" id="{C6EC0E17-EC7D-CE5A-BB2C-D89B3C55980A}"/>
+                <a16:creationId xmlns:a16="http://schemas.microsoft.com/office/drawing/2014/main" id="{2B28A9F9-F1ED-2511-79F4-9D0331BAB494}"/>
               </a:ext>
             </a:extLst>
           </p:cNvPr>
@@ -16313,7 +15539,7 @@
     </p:spTree>
     <p:extLst>
       <p:ext uri="{BB962C8B-B14F-4D97-AF65-F5344CB8AC3E}">
-        <p14:creationId xmlns:p14="http://schemas.microsoft.com/office/powerpoint/2010/main" val="270565976"/>
+        <p14:creationId xmlns:p14="http://schemas.microsoft.com/office/powerpoint/2010/main" val="3828664875"/>
       </p:ext>
     </p:extLst>
   </p:cSld>
@@ -16323,226 +15549,7 @@
 </p:sld>
 </file>
 
-<file path=ppt/slides/slide6.xml><?xml version="1.0" encoding="utf-8"?>
-<p:sld xmlns:a="http://schemas.openxmlformats.org/drawingml/2006/main" xmlns:r="http://schemas.openxmlformats.org/officeDocument/2006/relationships" xmlns:p="http://schemas.openxmlformats.org/presentationml/2006/main">
-  <p:cSld>
-    <p:spTree>
-      <p:nvGrpSpPr>
-        <p:cNvPr id="1" name="">
-          <a:extLst>
-            <a:ext uri="{FF2B5EF4-FFF2-40B4-BE49-F238E27FC236}">
-              <a16:creationId xmlns:a16="http://schemas.microsoft.com/office/drawing/2014/main" id="{D0E29B2E-4452-DD1C-AE89-14FF83E0B987}"/>
-            </a:ext>
-          </a:extLst>
-        </p:cNvPr>
-        <p:cNvGrpSpPr/>
-        <p:nvPr/>
-      </p:nvGrpSpPr>
-      <p:grpSpPr>
-        <a:xfrm>
-          <a:off x="0" y="0"/>
-          <a:ext cx="0" cy="0"/>
-          <a:chOff x="0" y="0"/>
-          <a:chExt cx="0" cy="0"/>
-        </a:xfrm>
-      </p:grpSpPr>
-      <p:sp>
-        <p:nvSpPr>
-          <p:cNvPr id="5" name="Titel 4">
-            <a:extLst>
-              <a:ext uri="{FF2B5EF4-FFF2-40B4-BE49-F238E27FC236}">
-                <a16:creationId xmlns:a16="http://schemas.microsoft.com/office/drawing/2014/main" id="{A9FE6BFD-760D-644F-8488-610402DBB7A0}"/>
-              </a:ext>
-            </a:extLst>
-          </p:cNvPr>
-          <p:cNvSpPr>
-            <a:spLocks noGrp="1"/>
-          </p:cNvSpPr>
-          <p:nvPr>
-            <p:ph type="title"/>
-          </p:nvPr>
-        </p:nvSpPr>
-        <p:spPr/>
-        <p:txBody>
-          <a:bodyPr/>
-          <a:lstStyle/>
-          <a:p>
-            <a:r>
-              <a:rPr lang="nl-NL" dirty="0"/>
-              <a:t>Programma V1S 5.038</a:t>
-            </a:r>
-          </a:p>
-        </p:txBody>
-      </p:sp>
-      <p:sp>
-        <p:nvSpPr>
-          <p:cNvPr id="6" name="Tijdelijke aanduiding voor inhoud 5">
-            <a:extLst>
-              <a:ext uri="{FF2B5EF4-FFF2-40B4-BE49-F238E27FC236}">
-                <a16:creationId xmlns:a16="http://schemas.microsoft.com/office/drawing/2014/main" id="{296DCD74-B20F-2EB8-7453-5CEFAD045477}"/>
-              </a:ext>
-            </a:extLst>
-          </p:cNvPr>
-          <p:cNvSpPr>
-            <a:spLocks noGrp="1"/>
-          </p:cNvSpPr>
-          <p:nvPr>
-            <p:ph sz="quarter" idx="15"/>
-          </p:nvPr>
-        </p:nvSpPr>
-        <p:spPr>
-          <a:xfrm>
-            <a:off x="971551" y="1797051"/>
-            <a:ext cx="8436817" cy="4080933"/>
-          </a:xfrm>
-        </p:spPr>
-        <p:txBody>
-          <a:bodyPr>
-            <a:normAutofit/>
-          </a:bodyPr>
-          <a:lstStyle/>
-          <a:p>
-            <a:pPr marL="0" indent="0">
-              <a:buNone/>
-            </a:pPr>
-            <a:r>
-              <a:rPr lang="en-US" dirty="0"/>
-              <a:t>1</a:t>
-            </a:r>
-            <a:r>
-              <a:rPr lang="nl-NL" dirty="0"/>
-              <a:t>3:00 – 13:15	Programma uitleg</a:t>
-            </a:r>
-          </a:p>
-          <a:p>
-            <a:pPr marL="0" indent="0">
-              <a:buNone/>
-            </a:pPr>
-            <a:r>
-              <a:rPr lang="nl-NL" dirty="0"/>
-              <a:t>13:15 – 14:00	Werken aan </a:t>
-            </a:r>
-            <a:r>
-              <a:rPr lang="nl-NL" dirty="0" err="1"/>
-              <a:t>Steam</a:t>
-            </a:r>
-            <a:endParaRPr lang="nl-NL" dirty="0"/>
-          </a:p>
-          <a:p>
-            <a:pPr marL="0" indent="0">
-              <a:buNone/>
-            </a:pPr>
-            <a:r>
-              <a:rPr lang="nl-NL" dirty="0"/>
-              <a:t>14:00 – 14:30	Vragen bedenken voor alle richtingen</a:t>
-            </a:r>
-          </a:p>
-          <a:p>
-            <a:pPr marL="0" indent="0">
-              <a:buNone/>
-            </a:pPr>
-            <a:r>
-              <a:rPr lang="nl-NL" dirty="0"/>
-              <a:t>14:30 – 15:15	CSC voorlichting</a:t>
-            </a:r>
-          </a:p>
-          <a:p>
-            <a:pPr marL="0" indent="0">
-              <a:buNone/>
-            </a:pPr>
-            <a:r>
-              <a:rPr lang="nl-NL" dirty="0"/>
-              <a:t>					Door: Jan van Doorn</a:t>
-            </a:r>
-          </a:p>
-          <a:p>
-            <a:pPr marL="0" indent="0">
-              <a:buNone/>
-            </a:pPr>
-            <a:r>
-              <a:rPr lang="nl-NL" dirty="0"/>
-              <a:t>15:15 – 16:00	TI voorlichting</a:t>
-            </a:r>
-          </a:p>
-          <a:p>
-            <a:pPr marL="0" indent="0">
-              <a:buNone/>
-            </a:pPr>
-            <a:r>
-              <a:rPr lang="nl-NL" dirty="0"/>
-              <a:t>					Door: Gera Pronk</a:t>
-            </a:r>
-          </a:p>
-          <a:p>
-            <a:pPr marL="0" indent="0">
-              <a:buNone/>
-            </a:pPr>
-            <a:r>
-              <a:rPr lang="nl-NL" dirty="0"/>
-              <a:t> </a:t>
-            </a:r>
-          </a:p>
-        </p:txBody>
-      </p:sp>
-      <p:pic>
-        <p:nvPicPr>
-          <p:cNvPr id="7" name="Picture 2" descr="http://gbw-online.nl/wp-content/uploads/2015/02/agenda-stylo.jpg">
-            <a:extLst>
-              <a:ext uri="{FF2B5EF4-FFF2-40B4-BE49-F238E27FC236}">
-                <a16:creationId xmlns:a16="http://schemas.microsoft.com/office/drawing/2014/main" id="{64AFF942-6DDA-F8A8-BA16-C0A832D9B61D}"/>
-              </a:ext>
-            </a:extLst>
-          </p:cNvPr>
-          <p:cNvPicPr>
-            <a:picLocks noChangeAspect="1" noChangeArrowheads="1"/>
-          </p:cNvPicPr>
-          <p:nvPr/>
-        </p:nvPicPr>
-        <p:blipFill rotWithShape="1">
-          <a:blip r:embed="rId3" cstate="print">
-            <a:extLst>
-              <a:ext uri="{28A0092B-C50C-407E-A947-70E740481C1C}">
-                <a14:useLocalDpi xmlns:a14="http://schemas.microsoft.com/office/drawing/2010/main" val="0"/>
-              </a:ext>
-            </a:extLst>
-          </a:blip>
-          <a:srcRect l="30704"/>
-          <a:stretch/>
-        </p:blipFill>
-        <p:spPr bwMode="auto">
-          <a:xfrm>
-            <a:off x="9589418" y="-10929"/>
-            <a:ext cx="2602583" cy="2503825"/>
-          </a:xfrm>
-          <a:prstGeom prst="rect">
-            <a:avLst/>
-          </a:prstGeom>
-          <a:noFill/>
-          <a:extLst>
-            <a:ext uri="{909E8E84-426E-40DD-AFC4-6F175D3DCCD1}">
-              <a14:hiddenFill xmlns:a14="http://schemas.microsoft.com/office/drawing/2010/main">
-                <a:solidFill>
-                  <a:srgbClr val="FFFFFF"/>
-                </a:solidFill>
-              </a14:hiddenFill>
-            </a:ext>
-          </a:extLst>
-        </p:spPr>
-      </p:pic>
-    </p:spTree>
-    <p:extLst>
-      <p:ext uri="{BB962C8B-B14F-4D97-AF65-F5344CB8AC3E}">
-        <p14:creationId xmlns:p14="http://schemas.microsoft.com/office/powerpoint/2010/main" val="3505890319"/>
-      </p:ext>
-    </p:extLst>
-  </p:cSld>
-  <p:clrMapOvr>
-    <a:masterClrMapping/>
-  </p:clrMapOvr>
-</p:sld>
-</file>
-
-<file path=ppt/slides/slide7.xml><?xml version="1.0" encoding="utf-8"?>
+<file path=ppt/slides/slide5.xml><?xml version="1.0" encoding="utf-8"?>
 <p:sld xmlns:a="http://schemas.openxmlformats.org/drawingml/2006/main" xmlns:r="http://schemas.openxmlformats.org/officeDocument/2006/relationships" xmlns:p="http://schemas.openxmlformats.org/presentationml/2006/main">
   <p:cSld>
     <p:spTree>
@@ -17769,6 +16776,19 @@
 </file>
 
 <file path=customXml/item1.xml><?xml version="1.0" encoding="utf-8"?>
+<p:properties xmlns:p="http://schemas.microsoft.com/office/2006/metadata/properties" xmlns:xsi="http://www.w3.org/2001/XMLSchema-instance" xmlns:pc="http://schemas.microsoft.com/office/infopath/2007/PartnerControls">
+  <documentManagement>
+    <test xmlns="8e39aab0-005d-45b6-a80e-05e5df2908d1" xsi:nil="true"/>
+    <TaxCatchAll xmlns="cc018f0f-33de-4c4c-920d-26dc6e1acc33" xsi:nil="true"/>
+    <lcf76f155ced4ddcb4097134ff3c332f xmlns="8e39aab0-005d-45b6-a80e-05e5df2908d1">
+      <Terms xmlns="http://schemas.microsoft.com/office/infopath/2007/PartnerControls"/>
+    </lcf76f155ced4ddcb4097134ff3c332f>
+    <Description xmlns="8e39aab0-005d-45b6-a80e-05e5df2908d1" xsi:nil="true"/>
+  </documentManagement>
+</p:properties>
+</file>
+
+<file path=customXml/item2.xml><?xml version="1.0" encoding="utf-8"?>
 <ct:contentTypeSchema xmlns:ct="http://schemas.microsoft.com/office/2006/metadata/contentType" xmlns:ma="http://schemas.microsoft.com/office/2006/metadata/properties/metaAttributes" ct:_="" ma:_="" ma:contentTypeName="Document" ma:contentTypeID="0x01010081A80706761E274FBF7207A6EEFD509E" ma:contentTypeVersion="21" ma:contentTypeDescription="Een nieuw document maken." ma:contentTypeScope="" ma:versionID="c7f7fa388e5abb50cc001f149212818f">
   <xsd:schema xmlns:xsd="http://www.w3.org/2001/XMLSchema" xmlns:xs="http://www.w3.org/2001/XMLSchema" xmlns:p="http://schemas.microsoft.com/office/2006/metadata/properties" xmlns:ns2="8e39aab0-005d-45b6-a80e-05e5df2908d1" xmlns:ns3="cc018f0f-33de-4c4c-920d-26dc6e1acc33" targetNamespace="http://schemas.microsoft.com/office/2006/metadata/properties" ma:root="true" ma:fieldsID="08edb6dc26ea4fa726f6b1e3df08ac99" ns2:_="" ns3:_="">
     <xsd:import namespace="8e39aab0-005d-45b6-a80e-05e5df2908d1"/>
@@ -18039,19 +17059,6 @@
 </ct:contentTypeSchema>
 </file>
 
-<file path=customXml/item2.xml><?xml version="1.0" encoding="utf-8"?>
-<p:properties xmlns:p="http://schemas.microsoft.com/office/2006/metadata/properties" xmlns:xsi="http://www.w3.org/2001/XMLSchema-instance" xmlns:pc="http://schemas.microsoft.com/office/infopath/2007/PartnerControls">
-  <documentManagement>
-    <test xmlns="8e39aab0-005d-45b6-a80e-05e5df2908d1" xsi:nil="true"/>
-    <TaxCatchAll xmlns="cc018f0f-33de-4c4c-920d-26dc6e1acc33" xsi:nil="true"/>
-    <lcf76f155ced4ddcb4097134ff3c332f xmlns="8e39aab0-005d-45b6-a80e-05e5df2908d1">
-      <Terms xmlns="http://schemas.microsoft.com/office/infopath/2007/PartnerControls"/>
-    </lcf76f155ced4ddcb4097134ff3c332f>
-    <Description xmlns="8e39aab0-005d-45b6-a80e-05e5df2908d1" xsi:nil="true"/>
-  </documentManagement>
-</p:properties>
-</file>
-
 <file path=customXml/item3.xml><?xml version="1.0" encoding="utf-8"?>
 <?mso-contentType ?>
 <FormTemplates xmlns="http://schemas.microsoft.com/sharepoint/v3/contenttype/forms">
@@ -18062,6 +17069,23 @@
 </file>
 
 <file path=customXml/itemProps1.xml><?xml version="1.0" encoding="utf-8"?>
+<ds:datastoreItem xmlns:ds="http://schemas.openxmlformats.org/officeDocument/2006/customXml" ds:itemID="{E7163BBA-5F84-4F76-A7C6-0E4D63C0C7EA}">
+  <ds:schemaRefs>
+    <ds:schemaRef ds:uri="http://schemas.openxmlformats.org/package/2006/metadata/core-properties"/>
+    <ds:schemaRef ds:uri="http://purl.org/dc/dcmitype/"/>
+    <ds:schemaRef ds:uri="http://purl.org/dc/terms/"/>
+    <ds:schemaRef ds:uri="http://purl.org/dc/elements/1.1/"/>
+    <ds:schemaRef ds:uri="http://www.w3.org/XML/1998/namespace"/>
+    <ds:schemaRef ds:uri="8e39aab0-005d-45b6-a80e-05e5df2908d1"/>
+    <ds:schemaRef ds:uri="http://schemas.microsoft.com/office/2006/documentManagement/types"/>
+    <ds:schemaRef ds:uri="http://schemas.microsoft.com/office/infopath/2007/PartnerControls"/>
+    <ds:schemaRef ds:uri="cc018f0f-33de-4c4c-920d-26dc6e1acc33"/>
+    <ds:schemaRef ds:uri="http://schemas.microsoft.com/office/2006/metadata/properties"/>
+  </ds:schemaRefs>
+</ds:datastoreItem>
+</file>
+
+<file path=customXml/itemProps2.xml><?xml version="1.0" encoding="utf-8"?>
 <ds:datastoreItem xmlns:ds="http://schemas.openxmlformats.org/officeDocument/2006/customXml" ds:itemID="{121FD689-9C32-4222-BC76-FF86F32E80AD}">
   <ds:schemaRefs>
     <ds:schemaRef ds:uri="http://schemas.microsoft.com/office/2006/metadata/contentType"/>
@@ -18080,23 +17104,6 @@
 </ds:datastoreItem>
 </file>
 
-<file path=customXml/itemProps2.xml><?xml version="1.0" encoding="utf-8"?>
-<ds:datastoreItem xmlns:ds="http://schemas.openxmlformats.org/officeDocument/2006/customXml" ds:itemID="{E7163BBA-5F84-4F76-A7C6-0E4D63C0C7EA}">
-  <ds:schemaRefs>
-    <ds:schemaRef ds:uri="http://schemas.openxmlformats.org/package/2006/metadata/core-properties"/>
-    <ds:schemaRef ds:uri="http://purl.org/dc/dcmitype/"/>
-    <ds:schemaRef ds:uri="http://purl.org/dc/terms/"/>
-    <ds:schemaRef ds:uri="http://purl.org/dc/elements/1.1/"/>
-    <ds:schemaRef ds:uri="http://www.w3.org/XML/1998/namespace"/>
-    <ds:schemaRef ds:uri="8e39aab0-005d-45b6-a80e-05e5df2908d1"/>
-    <ds:schemaRef ds:uri="http://schemas.microsoft.com/office/2006/documentManagement/types"/>
-    <ds:schemaRef ds:uri="http://schemas.microsoft.com/office/infopath/2007/PartnerControls"/>
-    <ds:schemaRef ds:uri="cc018f0f-33de-4c4c-920d-26dc6e1acc33"/>
-    <ds:schemaRef ds:uri="http://schemas.microsoft.com/office/2006/metadata/properties"/>
-  </ds:schemaRefs>
-</ds:datastoreItem>
-</file>
-
 <file path=customXml/itemProps3.xml><?xml version="1.0" encoding="utf-8"?>
 <ds:datastoreItem xmlns:ds="http://schemas.openxmlformats.org/officeDocument/2006/customXml" ds:itemID="{2EA12E90-AB8E-4722-847F-197088183E8B}">
   <ds:schemaRefs>
